--- a/public/lessons/year-6-maths/autumn/week-9/revisit-decimal-calculation/teaching-powerpoint-v1.pptx
+++ b/public/lessons/year-6-maths/autumn/week-9/revisit-decimal-calculation/teaching-powerpoint-v1.pptx
@@ -2,24 +2,24 @@
 <file path=ppt/presentation.xml><?xml version="1.0" encoding="utf-8"?>
 <p:presentation xmlns:p="http://schemas.openxmlformats.org/presentationml/2006/main">
   <p:sldMasterIdLst>
-    <p:sldMasterId xmlns:r="http://schemas.openxmlformats.org/officeDocument/2006/relationships" id="2147483648" r:id="R0a73d19f0b6a42ce"/>
+    <p:sldMasterId xmlns:r="http://schemas.openxmlformats.org/officeDocument/2006/relationships" id="2147483648" r:id="R3b897f56682f47b9"/>
   </p:sldMasterIdLst>
   <p:notesMasterIdLst>
-    <p:notesMasterId xmlns:r="http://schemas.openxmlformats.org/officeDocument/2006/relationships" r:id="R85c03f65ab704e20"/>
+    <p:notesMasterId xmlns:r="http://schemas.openxmlformats.org/officeDocument/2006/relationships" r:id="R6b513499fd3944b1"/>
   </p:notesMasterIdLst>
   <p:sldIdLst>
-    <p:sldId xmlns:r="http://schemas.openxmlformats.org/officeDocument/2006/relationships" id="256" r:id="R0210d26c69e640c2"/>
-    <p:sldId xmlns:r="http://schemas.openxmlformats.org/officeDocument/2006/relationships" id="257" r:id="R48cbf1456f1e4c11"/>
-    <p:sldId xmlns:r="http://schemas.openxmlformats.org/officeDocument/2006/relationships" id="258" r:id="R3f783e3d28bf4ee5"/>
-    <p:sldId xmlns:r="http://schemas.openxmlformats.org/officeDocument/2006/relationships" id="259" r:id="R953b9349a07a4adc"/>
-    <p:sldId xmlns:r="http://schemas.openxmlformats.org/officeDocument/2006/relationships" id="260" r:id="R3aae71b7dbba4b0f"/>
-    <p:sldId xmlns:r="http://schemas.openxmlformats.org/officeDocument/2006/relationships" id="261" r:id="R777ead420c7043d3"/>
-    <p:sldId xmlns:r="http://schemas.openxmlformats.org/officeDocument/2006/relationships" id="262" r:id="Rd6ec3e77b5cc4474"/>
-    <p:sldId xmlns:r="http://schemas.openxmlformats.org/officeDocument/2006/relationships" id="263" r:id="R21ff8a22f8b74bf5"/>
-    <p:sldId xmlns:r="http://schemas.openxmlformats.org/officeDocument/2006/relationships" id="264" r:id="R2fad24d75cc544c9"/>
-    <p:sldId xmlns:r="http://schemas.openxmlformats.org/officeDocument/2006/relationships" id="265" r:id="R66fccdea137a469c"/>
-    <p:sldId xmlns:r="http://schemas.openxmlformats.org/officeDocument/2006/relationships" id="266" r:id="R7ab3188f0ef945b0"/>
-    <p:sldId xmlns:r="http://schemas.openxmlformats.org/officeDocument/2006/relationships" id="267" r:id="R6053465cf4e44854"/>
+    <p:sldId xmlns:r="http://schemas.openxmlformats.org/officeDocument/2006/relationships" id="256" r:id="Rc378ee761b964be4"/>
+    <p:sldId xmlns:r="http://schemas.openxmlformats.org/officeDocument/2006/relationships" id="257" r:id="R6750730b929347c2"/>
+    <p:sldId xmlns:r="http://schemas.openxmlformats.org/officeDocument/2006/relationships" id="258" r:id="R79bc5a45fb3945d1"/>
+    <p:sldId xmlns:r="http://schemas.openxmlformats.org/officeDocument/2006/relationships" id="259" r:id="R2c74c2ec014a4d33"/>
+    <p:sldId xmlns:r="http://schemas.openxmlformats.org/officeDocument/2006/relationships" id="260" r:id="R24a6055abd884ec1"/>
+    <p:sldId xmlns:r="http://schemas.openxmlformats.org/officeDocument/2006/relationships" id="261" r:id="R49b1f6c1d22f4e98"/>
+    <p:sldId xmlns:r="http://schemas.openxmlformats.org/officeDocument/2006/relationships" id="262" r:id="R516b2df89ac04663"/>
+    <p:sldId xmlns:r="http://schemas.openxmlformats.org/officeDocument/2006/relationships" id="263" r:id="R81fb9335e205438b"/>
+    <p:sldId xmlns:r="http://schemas.openxmlformats.org/officeDocument/2006/relationships" id="264" r:id="Ra70b0e3dc3a94c4e"/>
+    <p:sldId xmlns:r="http://schemas.openxmlformats.org/officeDocument/2006/relationships" id="265" r:id="Ra630af7040e04d4a"/>
+    <p:sldId xmlns:r="http://schemas.openxmlformats.org/officeDocument/2006/relationships" id="266" r:id="R1f989da4c8ea43cd"/>
+    <p:sldId xmlns:r="http://schemas.openxmlformats.org/officeDocument/2006/relationships" id="267" r:id="R5d618a65d6354b95"/>
   </p:sldIdLst>
   <p:sldSz cx="12192000" cy="6858000"/>
   <p:notesSz cx="6858000" cy="9144000"/>
@@ -873,7 +873,7 @@
           <a:lstStyle xmlns:a="http://schemas.openxmlformats.org/drawingml/2006/main"/>
           <a:p xmlns:a="http://schemas.openxmlformats.org/drawingml/2006/main">
             <a:r>
-              <a:t>I do. Reveal the question, setup and each calculation stage one click at a time. Pupils watch before copying. Model answer: 43.656.</a:t>
+              <a:t>I do. Reveal the question, then reveal each mathematical change one click at a time. Point to the numbers and operation that changed before moving to the next line. Final answer: 43.656.</a:t>
             </a:r>
           </a:p>
         </p:txBody>
@@ -1291,7 +1291,7 @@
   </p:cSld>
   <p:clrMap bg1="lt1" tx1="dk1" bg2="lt2" tx2="dk2" accent1="accent1" accent2="accent2" accent3="accent3" accent4="accent4" accent5="accent5" accent6="accent6" hlink="hlink" folHlink="folHlink"/>
   <p:sldLayoutIdLst>
-    <p:sldLayoutId xmlns:r="http://schemas.openxmlformats.org/officeDocument/2006/relationships" id="2147483649" r:id="Rab6cd2e40e6047d2"/>
+    <p:sldLayoutId xmlns:r="http://schemas.openxmlformats.org/officeDocument/2006/relationships" id="2147483649" r:id="R2b0d00a46f084150"/>
   </p:sldLayoutIdLst>
   <p:txStyles>
     <p:titleStyle>
@@ -1842,7 +1842,7 @@
           <p:cNvPr id="12" name="">
             <a:extLst xmlns:a="http://schemas.openxmlformats.org/drawingml/2006/main">
               <a:ext uri="{FF2B5EF4-FFF2-40B4-BE49-F238E27FC236}">
-                <a16:creationId xmlns:a16="http://schemas.microsoft.com/office/drawing/2014/main" id="{7E64C10F-2A20-470C-9D42-748EE6B66298}"/>
+                <a16:creationId xmlns:a16="http://schemas.microsoft.com/office/drawing/2014/main" id="{2F880EBC-3021-45FF-BF75-8168F4464A3E}"/>
               </a:ext>
             </a:extLst>
           </p:cNvPr>
@@ -1874,7 +1874,7 @@
           <p:cNvPr id="2" name="">
             <a:extLst xmlns:a="http://schemas.openxmlformats.org/drawingml/2006/main">
               <a:ext uri="{FF2B5EF4-FFF2-40B4-BE49-F238E27FC236}">
-                <a16:creationId xmlns:a16="http://schemas.microsoft.com/office/drawing/2014/main" id="{E204EFAF-BFB6-4BAA-927B-923C516032BD}"/>
+                <a16:creationId xmlns:a16="http://schemas.microsoft.com/office/drawing/2014/main" id="{D22E8600-40C8-4E2B-9D34-39FABF50228D}"/>
               </a:ext>
             </a:extLst>
           </p:cNvPr>
@@ -1931,7 +1931,7 @@
           <p:cNvPr id="3" name="">
             <a:extLst xmlns:a="http://schemas.openxmlformats.org/drawingml/2006/main">
               <a:ext uri="{FF2B5EF4-FFF2-40B4-BE49-F238E27FC236}">
-                <a16:creationId xmlns:a16="http://schemas.microsoft.com/office/drawing/2014/main" id="{13D3AFB6-177B-4139-8334-3D56B33D935E}"/>
+                <a16:creationId xmlns:a16="http://schemas.microsoft.com/office/drawing/2014/main" id="{CC1EFD2B-E975-4A97-B075-0CD64B24A6B6}"/>
               </a:ext>
             </a:extLst>
           </p:cNvPr>
@@ -1965,7 +1965,7 @@
           <p:cNvPr id="4" name="">
             <a:extLst xmlns:a="http://schemas.openxmlformats.org/drawingml/2006/main">
               <a:ext uri="{FF2B5EF4-FFF2-40B4-BE49-F238E27FC236}">
-                <a16:creationId xmlns:a16="http://schemas.microsoft.com/office/drawing/2014/main" id="{A57569B1-5929-4259-8A4E-6282FBCF7B1B}"/>
+                <a16:creationId xmlns:a16="http://schemas.microsoft.com/office/drawing/2014/main" id="{7AA9C861-F6C3-421E-9DF0-AB28E41037B5}"/>
               </a:ext>
             </a:extLst>
           </p:cNvPr>
@@ -2022,7 +2022,7 @@
           <p:cNvPr id="5" name="">
             <a:extLst xmlns:a="http://schemas.openxmlformats.org/drawingml/2006/main">
               <a:ext uri="{FF2B5EF4-FFF2-40B4-BE49-F238E27FC236}">
-                <a16:creationId xmlns:a16="http://schemas.microsoft.com/office/drawing/2014/main" id="{D1032A58-9DF6-4F02-AB98-E92FF1214342}"/>
+                <a16:creationId xmlns:a16="http://schemas.microsoft.com/office/drawing/2014/main" id="{41D296B5-0AA0-4997-9D85-9F47A22B6A52}"/>
               </a:ext>
             </a:extLst>
           </p:cNvPr>
@@ -2079,7 +2079,7 @@
           <p:cNvPr id="6" name="">
             <a:extLst xmlns:a="http://schemas.openxmlformats.org/drawingml/2006/main">
               <a:ext uri="{FF2B5EF4-FFF2-40B4-BE49-F238E27FC236}">
-                <a16:creationId xmlns:a16="http://schemas.microsoft.com/office/drawing/2014/main" id="{24442C02-8B93-46F2-B3C2-FDFEB5536958}"/>
+                <a16:creationId xmlns:a16="http://schemas.microsoft.com/office/drawing/2014/main" id="{02EC1C7D-BBC9-412C-BCEA-AD928F7C4F17}"/>
               </a:ext>
             </a:extLst>
           </p:cNvPr>
@@ -2113,7 +2113,7 @@
           <p:cNvPr id="7" name="">
             <a:extLst xmlns:a="http://schemas.openxmlformats.org/drawingml/2006/main">
               <a:ext uri="{FF2B5EF4-FFF2-40B4-BE49-F238E27FC236}">
-                <a16:creationId xmlns:a16="http://schemas.microsoft.com/office/drawing/2014/main" id="{A6E73DB3-1F64-4CAE-A981-5CAC70459C23}"/>
+                <a16:creationId xmlns:a16="http://schemas.microsoft.com/office/drawing/2014/main" id="{FA5AD53D-E207-47BF-A76E-12ED53DCA26C}"/>
               </a:ext>
             </a:extLst>
           </p:cNvPr>
@@ -2170,7 +2170,7 @@
           <p:cNvPr id="8" name="">
             <a:extLst xmlns:a="http://schemas.openxmlformats.org/drawingml/2006/main">
               <a:ext uri="{FF2B5EF4-FFF2-40B4-BE49-F238E27FC236}">
-                <a16:creationId xmlns:a16="http://schemas.microsoft.com/office/drawing/2014/main" id="{2151757D-636E-4985-A48A-BAF8856B6226}"/>
+                <a16:creationId xmlns:a16="http://schemas.microsoft.com/office/drawing/2014/main" id="{178EE2CB-A66B-4CBE-B15A-BD960AECCFB6}"/>
               </a:ext>
             </a:extLst>
           </p:cNvPr>
@@ -2227,7 +2227,7 @@
           <p:cNvPr id="9" name="">
             <a:extLst xmlns:a="http://schemas.openxmlformats.org/drawingml/2006/main">
               <a:ext uri="{FF2B5EF4-FFF2-40B4-BE49-F238E27FC236}">
-                <a16:creationId xmlns:a16="http://schemas.microsoft.com/office/drawing/2014/main" id="{82305F42-F084-43E2-A443-3C22F582C531}"/>
+                <a16:creationId xmlns:a16="http://schemas.microsoft.com/office/drawing/2014/main" id="{24D25C66-8B08-4A1E-9A0D-3FB1BBE08C48}"/>
               </a:ext>
             </a:extLst>
           </p:cNvPr>
@@ -2284,7 +2284,7 @@
           <p:cNvPr id="10" name="">
             <a:extLst xmlns:a="http://schemas.openxmlformats.org/drawingml/2006/main">
               <a:ext uri="{FF2B5EF4-FFF2-40B4-BE49-F238E27FC236}">
-                <a16:creationId xmlns:a16="http://schemas.microsoft.com/office/drawing/2014/main" id="{89A6B699-CD4A-4BFA-9FE9-0D1AAAEDEDB6}"/>
+                <a16:creationId xmlns:a16="http://schemas.microsoft.com/office/drawing/2014/main" id="{8ADDB3FB-D78A-4452-8328-460BD784958D}"/>
               </a:ext>
             </a:extLst>
           </p:cNvPr>
@@ -2341,7 +2341,7 @@
           <p:cNvPr id="11" name="">
             <a:extLst xmlns:a="http://schemas.openxmlformats.org/drawingml/2006/main">
               <a:ext uri="{FF2B5EF4-FFF2-40B4-BE49-F238E27FC236}">
-                <a16:creationId xmlns:a16="http://schemas.microsoft.com/office/drawing/2014/main" id="{A84F56E9-3813-46B0-A6BE-D465F05B1B22}"/>
+                <a16:creationId xmlns:a16="http://schemas.microsoft.com/office/drawing/2014/main" id="{AF88ACB9-C23E-499E-8B5F-4EC3E7DFC2EE}"/>
               </a:ext>
             </a:extLst>
           </p:cNvPr>
@@ -2396,7 +2396,7 @@
     </p:spTree>
     <p:extLst>
       <p:ext uri="{BB962C8B-B14F-4D97-AF65-F5344CB8AC3E}">
-        <p14:creationId xmlns:p14="http://schemas.microsoft.com/office/powerpoint/2010/main" val="1244235514"/>
+        <p14:creationId xmlns:p14="http://schemas.microsoft.com/office/powerpoint/2010/main" val="1207389297"/>
       </p:ext>
     </p:extLst>
   </p:cSld>
@@ -2427,7 +2427,7 @@
           <p:cNvPr id="14" name="">
             <a:extLst xmlns:a="http://schemas.openxmlformats.org/drawingml/2006/main">
               <a:ext uri="{FF2B5EF4-FFF2-40B4-BE49-F238E27FC236}">
-                <a16:creationId xmlns:a16="http://schemas.microsoft.com/office/drawing/2014/main" id="{2EF49BEA-728F-4817-B122-6D5AE97F9B54}"/>
+                <a16:creationId xmlns:a16="http://schemas.microsoft.com/office/drawing/2014/main" id="{C25AE1D2-C4F2-4AE8-B744-462A06A49233}"/>
               </a:ext>
             </a:extLst>
           </p:cNvPr>
@@ -2459,7 +2459,7 @@
           <p:cNvPr id="2" name="">
             <a:extLst xmlns:a="http://schemas.openxmlformats.org/drawingml/2006/main">
               <a:ext uri="{FF2B5EF4-FFF2-40B4-BE49-F238E27FC236}">
-                <a16:creationId xmlns:a16="http://schemas.microsoft.com/office/drawing/2014/main" id="{3458CEAA-34D9-456A-9DBF-4F6C719650AD}"/>
+                <a16:creationId xmlns:a16="http://schemas.microsoft.com/office/drawing/2014/main" id="{09A73E90-1C5F-460E-9A24-13EA419CAD5A}"/>
               </a:ext>
             </a:extLst>
           </p:cNvPr>
@@ -2516,7 +2516,7 @@
           <p:cNvPr id="3" name="">
             <a:extLst xmlns:a="http://schemas.openxmlformats.org/drawingml/2006/main">
               <a:ext uri="{FF2B5EF4-FFF2-40B4-BE49-F238E27FC236}">
-                <a16:creationId xmlns:a16="http://schemas.microsoft.com/office/drawing/2014/main" id="{509B3348-B823-4963-968F-8CAA2B563212}"/>
+                <a16:creationId xmlns:a16="http://schemas.microsoft.com/office/drawing/2014/main" id="{D7E41543-EF1B-4ABE-A00F-EC489272937F}"/>
               </a:ext>
             </a:extLst>
           </p:cNvPr>
@@ -2548,7 +2548,7 @@
           <p:cNvPr id="4" name="">
             <a:extLst xmlns:a="http://schemas.openxmlformats.org/drawingml/2006/main">
               <a:ext uri="{FF2B5EF4-FFF2-40B4-BE49-F238E27FC236}">
-                <a16:creationId xmlns:a16="http://schemas.microsoft.com/office/drawing/2014/main" id="{5337C2DA-C080-469D-A790-B549A0479AB0}"/>
+                <a16:creationId xmlns:a16="http://schemas.microsoft.com/office/drawing/2014/main" id="{0D9CA0F7-5063-4A41-B4CB-B8ED03A0DE0F}"/>
               </a:ext>
             </a:extLst>
           </p:cNvPr>
@@ -2605,7 +2605,7 @@
           <p:cNvPr id="5" name="">
             <a:extLst xmlns:a="http://schemas.openxmlformats.org/drawingml/2006/main">
               <a:ext uri="{FF2B5EF4-FFF2-40B4-BE49-F238E27FC236}">
-                <a16:creationId xmlns:a16="http://schemas.microsoft.com/office/drawing/2014/main" id="{D2AE7F66-A5ED-4763-B21C-E2D60FD46FF1}"/>
+                <a16:creationId xmlns:a16="http://schemas.microsoft.com/office/drawing/2014/main" id="{3895BB71-442B-422C-A65F-3CDA74E5F6EE}"/>
               </a:ext>
             </a:extLst>
           </p:cNvPr>
@@ -2662,7 +2662,7 @@
           <p:cNvPr id="6" name="">
             <a:extLst xmlns:a="http://schemas.openxmlformats.org/drawingml/2006/main">
               <a:ext uri="{FF2B5EF4-FFF2-40B4-BE49-F238E27FC236}">
-                <a16:creationId xmlns:a16="http://schemas.microsoft.com/office/drawing/2014/main" id="{82F611E7-6C2E-484C-BDC5-A1BEFF60B5BF}"/>
+                <a16:creationId xmlns:a16="http://schemas.microsoft.com/office/drawing/2014/main" id="{0E95349B-1A94-4CD6-BF1A-BC6CECDD4FC2}"/>
               </a:ext>
             </a:extLst>
           </p:cNvPr>
@@ -2719,7 +2719,7 @@
           <p:cNvPr id="7" name="">
             <a:extLst xmlns:a="http://schemas.openxmlformats.org/drawingml/2006/main">
               <a:ext uri="{FF2B5EF4-FFF2-40B4-BE49-F238E27FC236}">
-                <a16:creationId xmlns:a16="http://schemas.microsoft.com/office/drawing/2014/main" id="{31E5A218-0D59-4486-89EA-224209AB9759}"/>
+                <a16:creationId xmlns:a16="http://schemas.microsoft.com/office/drawing/2014/main" id="{8140B725-0516-466C-8886-C65E116F4590}"/>
               </a:ext>
             </a:extLst>
           </p:cNvPr>
@@ -2751,7 +2751,7 @@
           <p:cNvPr id="8" name="">
             <a:extLst xmlns:a="http://schemas.openxmlformats.org/drawingml/2006/main">
               <a:ext uri="{FF2B5EF4-FFF2-40B4-BE49-F238E27FC236}">
-                <a16:creationId xmlns:a16="http://schemas.microsoft.com/office/drawing/2014/main" id="{8A4377F2-CB36-449A-9788-AC2D5D2DFFFB}"/>
+                <a16:creationId xmlns:a16="http://schemas.microsoft.com/office/drawing/2014/main" id="{65A50A33-1104-4136-917B-F0BD91A5CC68}"/>
               </a:ext>
             </a:extLst>
           </p:cNvPr>
@@ -2808,7 +2808,7 @@
           <p:cNvPr id="9" name="">
             <a:extLst xmlns:a="http://schemas.openxmlformats.org/drawingml/2006/main">
               <a:ext uri="{FF2B5EF4-FFF2-40B4-BE49-F238E27FC236}">
-                <a16:creationId xmlns:a16="http://schemas.microsoft.com/office/drawing/2014/main" id="{61605FBE-7FB4-4B11-974A-15D9BDEFF779}"/>
+                <a16:creationId xmlns:a16="http://schemas.microsoft.com/office/drawing/2014/main" id="{FBC24920-ACE9-4BFE-B793-1ACA6229617F}"/>
               </a:ext>
             </a:extLst>
           </p:cNvPr>
@@ -2865,7 +2865,7 @@
           <p:cNvPr id="10" name="">
             <a:extLst xmlns:a="http://schemas.openxmlformats.org/drawingml/2006/main">
               <a:ext uri="{FF2B5EF4-FFF2-40B4-BE49-F238E27FC236}">
-                <a16:creationId xmlns:a16="http://schemas.microsoft.com/office/drawing/2014/main" id="{6925239A-0DDE-4AC4-B195-956F009C620C}"/>
+                <a16:creationId xmlns:a16="http://schemas.microsoft.com/office/drawing/2014/main" id="{256D303F-9C31-4CE0-B86A-C0F35189D782}"/>
               </a:ext>
             </a:extLst>
           </p:cNvPr>
@@ -2922,7 +2922,7 @@
           <p:cNvPr id="11" name="">
             <a:extLst xmlns:a="http://schemas.openxmlformats.org/drawingml/2006/main">
               <a:ext uri="{FF2B5EF4-FFF2-40B4-BE49-F238E27FC236}">
-                <a16:creationId xmlns:a16="http://schemas.microsoft.com/office/drawing/2014/main" id="{D1A5A881-18CF-414E-A190-3EC91A7D92E7}"/>
+                <a16:creationId xmlns:a16="http://schemas.microsoft.com/office/drawing/2014/main" id="{17BB921C-0D2C-463E-A670-714249E3CA22}"/>
               </a:ext>
             </a:extLst>
           </p:cNvPr>
@@ -2979,7 +2979,7 @@
           <p:cNvPr id="12" name="">
             <a:extLst xmlns:a="http://schemas.openxmlformats.org/drawingml/2006/main">
               <a:ext uri="{FF2B5EF4-FFF2-40B4-BE49-F238E27FC236}">
-                <a16:creationId xmlns:a16="http://schemas.microsoft.com/office/drawing/2014/main" id="{93548071-B0F7-4061-8C69-68CA5D822887}"/>
+                <a16:creationId xmlns:a16="http://schemas.microsoft.com/office/drawing/2014/main" id="{BF5BD441-C9A7-4447-B93F-7E8D489A24C7}"/>
               </a:ext>
             </a:extLst>
           </p:cNvPr>
@@ -3036,7 +3036,7 @@
           <p:cNvPr id="13" name="">
             <a:extLst xmlns:a="http://schemas.openxmlformats.org/drawingml/2006/main">
               <a:ext uri="{FF2B5EF4-FFF2-40B4-BE49-F238E27FC236}">
-                <a16:creationId xmlns:a16="http://schemas.microsoft.com/office/drawing/2014/main" id="{C091F3F0-5ABF-4A14-A1A3-4D774D103FC6}"/>
+                <a16:creationId xmlns:a16="http://schemas.microsoft.com/office/drawing/2014/main" id="{C54E632A-019C-449D-BF50-9A212F0E9568}"/>
               </a:ext>
             </a:extLst>
           </p:cNvPr>
@@ -3091,7 +3091,7 @@
     </p:spTree>
     <p:extLst>
       <p:ext uri="{BB962C8B-B14F-4D97-AF65-F5344CB8AC3E}">
-        <p14:creationId xmlns:p14="http://schemas.microsoft.com/office/powerpoint/2010/main" val="798817323"/>
+        <p14:creationId xmlns:p14="http://schemas.microsoft.com/office/powerpoint/2010/main" val="1910326576"/>
       </p:ext>
     </p:extLst>
   </p:cSld>
@@ -3292,7 +3292,7 @@
           <p:cNvPr id="19" name="">
             <a:extLst xmlns:a="http://schemas.openxmlformats.org/drawingml/2006/main">
               <a:ext uri="{FF2B5EF4-FFF2-40B4-BE49-F238E27FC236}">
-                <a16:creationId xmlns:a16="http://schemas.microsoft.com/office/drawing/2014/main" id="{1B9336EA-231E-4247-A900-49BCA4DA4952}"/>
+                <a16:creationId xmlns:a16="http://schemas.microsoft.com/office/drawing/2014/main" id="{35E9786B-5198-4665-92F5-A427FDC0B1CA}"/>
               </a:ext>
             </a:extLst>
           </p:cNvPr>
@@ -3324,7 +3324,7 @@
           <p:cNvPr id="2" name="">
             <a:extLst xmlns:a="http://schemas.openxmlformats.org/drawingml/2006/main">
               <a:ext uri="{FF2B5EF4-FFF2-40B4-BE49-F238E27FC236}">
-                <a16:creationId xmlns:a16="http://schemas.microsoft.com/office/drawing/2014/main" id="{6F3270AB-DA64-4FD8-B5E8-31D3EF085075}"/>
+                <a16:creationId xmlns:a16="http://schemas.microsoft.com/office/drawing/2014/main" id="{E075A6F9-343B-400E-B5AB-8A9392864EE4}"/>
               </a:ext>
             </a:extLst>
           </p:cNvPr>
@@ -3381,7 +3381,7 @@
           <p:cNvPr id="3" name="">
             <a:extLst xmlns:a="http://schemas.openxmlformats.org/drawingml/2006/main">
               <a:ext uri="{FF2B5EF4-FFF2-40B4-BE49-F238E27FC236}">
-                <a16:creationId xmlns:a16="http://schemas.microsoft.com/office/drawing/2014/main" id="{E40CF2FF-369F-4F25-9D9B-D797B1AA259A}"/>
+                <a16:creationId xmlns:a16="http://schemas.microsoft.com/office/drawing/2014/main" id="{247D050A-3F29-44D1-8248-D5864C1A63F8}"/>
               </a:ext>
             </a:extLst>
           </p:cNvPr>
@@ -3413,7 +3413,7 @@
           <p:cNvPr id="4" name="">
             <a:extLst xmlns:a="http://schemas.openxmlformats.org/drawingml/2006/main">
               <a:ext uri="{FF2B5EF4-FFF2-40B4-BE49-F238E27FC236}">
-                <a16:creationId xmlns:a16="http://schemas.microsoft.com/office/drawing/2014/main" id="{A8741950-A185-42D9-ADBD-F930FC611D0E}"/>
+                <a16:creationId xmlns:a16="http://schemas.microsoft.com/office/drawing/2014/main" id="{672C0CF0-6175-496C-8FC4-DFEFDC030AEC}"/>
               </a:ext>
             </a:extLst>
           </p:cNvPr>
@@ -3470,7 +3470,7 @@
           <p:cNvPr id="5" name="">
             <a:extLst xmlns:a="http://schemas.openxmlformats.org/drawingml/2006/main">
               <a:ext uri="{FF2B5EF4-FFF2-40B4-BE49-F238E27FC236}">
-                <a16:creationId xmlns:a16="http://schemas.microsoft.com/office/drawing/2014/main" id="{F71644A7-D5C8-44CE-9816-B9248FBAF738}"/>
+                <a16:creationId xmlns:a16="http://schemas.microsoft.com/office/drawing/2014/main" id="{66C23891-4C01-4DD1-B26E-2240D20EA0A7}"/>
               </a:ext>
             </a:extLst>
           </p:cNvPr>
@@ -3527,7 +3527,7 @@
           <p:cNvPr id="6" name="">
             <a:extLst xmlns:a="http://schemas.openxmlformats.org/drawingml/2006/main">
               <a:ext uri="{FF2B5EF4-FFF2-40B4-BE49-F238E27FC236}">
-                <a16:creationId xmlns:a16="http://schemas.microsoft.com/office/drawing/2014/main" id="{21D255DE-C259-4DEC-B623-A68D32B50978}"/>
+                <a16:creationId xmlns:a16="http://schemas.microsoft.com/office/drawing/2014/main" id="{B18490F1-B48B-424E-BA1F-EB2A22F86CED}"/>
               </a:ext>
             </a:extLst>
           </p:cNvPr>
@@ -3584,7 +3584,7 @@
           <p:cNvPr id="7" name="">
             <a:extLst xmlns:a="http://schemas.openxmlformats.org/drawingml/2006/main">
               <a:ext uri="{FF2B5EF4-FFF2-40B4-BE49-F238E27FC236}">
-                <a16:creationId xmlns:a16="http://schemas.microsoft.com/office/drawing/2014/main" id="{FAB7BDBB-64FD-4244-A3FD-04C2585268D4}"/>
+                <a16:creationId xmlns:a16="http://schemas.microsoft.com/office/drawing/2014/main" id="{AF9B40B6-9282-4A15-8147-763D4601A129}"/>
               </a:ext>
             </a:extLst>
           </p:cNvPr>
@@ -3616,7 +3616,7 @@
           <p:cNvPr id="8" name="">
             <a:extLst xmlns:a="http://schemas.openxmlformats.org/drawingml/2006/main">
               <a:ext uri="{FF2B5EF4-FFF2-40B4-BE49-F238E27FC236}">
-                <a16:creationId xmlns:a16="http://schemas.microsoft.com/office/drawing/2014/main" id="{144C0534-74DE-4025-8D2C-E7E6F85024BE}"/>
+                <a16:creationId xmlns:a16="http://schemas.microsoft.com/office/drawing/2014/main" id="{676DC4BF-571E-4D18-9FFA-AC19BB2ECFD8}"/>
               </a:ext>
             </a:extLst>
           </p:cNvPr>
@@ -3673,7 +3673,7 @@
           <p:cNvPr id="9" name="">
             <a:extLst xmlns:a="http://schemas.openxmlformats.org/drawingml/2006/main">
               <a:ext uri="{FF2B5EF4-FFF2-40B4-BE49-F238E27FC236}">
-                <a16:creationId xmlns:a16="http://schemas.microsoft.com/office/drawing/2014/main" id="{4020263A-2789-49AC-BF71-10EAE9D9E208}"/>
+                <a16:creationId xmlns:a16="http://schemas.microsoft.com/office/drawing/2014/main" id="{F7078C19-A939-4172-856B-DECF0BB895A5}"/>
               </a:ext>
             </a:extLst>
           </p:cNvPr>
@@ -3730,7 +3730,7 @@
           <p:cNvPr id="10" name="">
             <a:extLst xmlns:a="http://schemas.openxmlformats.org/drawingml/2006/main">
               <a:ext uri="{FF2B5EF4-FFF2-40B4-BE49-F238E27FC236}">
-                <a16:creationId xmlns:a16="http://schemas.microsoft.com/office/drawing/2014/main" id="{FA4556E8-15C2-4B85-87F5-621FE508E9A4}"/>
+                <a16:creationId xmlns:a16="http://schemas.microsoft.com/office/drawing/2014/main" id="{9B7B31E6-215C-41E6-8049-60A0DC0E15AE}"/>
               </a:ext>
             </a:extLst>
           </p:cNvPr>
@@ -3787,7 +3787,7 @@
           <p:cNvPr id="11" name="">
             <a:extLst xmlns:a="http://schemas.openxmlformats.org/drawingml/2006/main">
               <a:ext uri="{FF2B5EF4-FFF2-40B4-BE49-F238E27FC236}">
-                <a16:creationId xmlns:a16="http://schemas.microsoft.com/office/drawing/2014/main" id="{37077587-16E6-4114-9959-DFED459FDC1B}"/>
+                <a16:creationId xmlns:a16="http://schemas.microsoft.com/office/drawing/2014/main" id="{C2A46D28-786D-46A7-896D-50FA42C219FF}"/>
               </a:ext>
             </a:extLst>
           </p:cNvPr>
@@ -3821,7 +3821,7 @@
           <p:cNvPr id="12" name="">
             <a:extLst xmlns:a="http://schemas.openxmlformats.org/drawingml/2006/main">
               <a:ext uri="{FF2B5EF4-FFF2-40B4-BE49-F238E27FC236}">
-                <a16:creationId xmlns:a16="http://schemas.microsoft.com/office/drawing/2014/main" id="{41D0A400-A126-4DB5-8075-3043B0FDF5BD}"/>
+                <a16:creationId xmlns:a16="http://schemas.microsoft.com/office/drawing/2014/main" id="{C3CEF518-5FAC-4913-9B29-0D7DD6912CDC}"/>
               </a:ext>
             </a:extLst>
           </p:cNvPr>
@@ -3878,7 +3878,7 @@
           <p:cNvPr id="13" name="">
             <a:extLst xmlns:a="http://schemas.openxmlformats.org/drawingml/2006/main">
               <a:ext uri="{FF2B5EF4-FFF2-40B4-BE49-F238E27FC236}">
-                <a16:creationId xmlns:a16="http://schemas.microsoft.com/office/drawing/2014/main" id="{DB9F9C77-02C1-4C1B-AD13-0A872C01289E}"/>
+                <a16:creationId xmlns:a16="http://schemas.microsoft.com/office/drawing/2014/main" id="{A91D5B6D-85D7-4385-AE71-22D334D4AB55}"/>
               </a:ext>
             </a:extLst>
           </p:cNvPr>
@@ -3935,7 +3935,7 @@
           <p:cNvPr id="14" name="">
             <a:extLst xmlns:a="http://schemas.openxmlformats.org/drawingml/2006/main">
               <a:ext uri="{FF2B5EF4-FFF2-40B4-BE49-F238E27FC236}">
-                <a16:creationId xmlns:a16="http://schemas.microsoft.com/office/drawing/2014/main" id="{6A4E3E1F-CEED-4191-9395-D84EEB4FD65D}"/>
+                <a16:creationId xmlns:a16="http://schemas.microsoft.com/office/drawing/2014/main" id="{07231D65-4121-4573-BFC0-57A96F9B62DF}"/>
               </a:ext>
             </a:extLst>
           </p:cNvPr>
@@ -3992,7 +3992,7 @@
           <p:cNvPr id="15" name="">
             <a:extLst xmlns:a="http://schemas.openxmlformats.org/drawingml/2006/main">
               <a:ext uri="{FF2B5EF4-FFF2-40B4-BE49-F238E27FC236}">
-                <a16:creationId xmlns:a16="http://schemas.microsoft.com/office/drawing/2014/main" id="{8E595B70-D222-4469-91B4-92A3F3367A16}"/>
+                <a16:creationId xmlns:a16="http://schemas.microsoft.com/office/drawing/2014/main" id="{7E4ABF3F-5444-4C6B-BE3A-2B7E5C60F3E2}"/>
               </a:ext>
             </a:extLst>
           </p:cNvPr>
@@ -4026,7 +4026,7 @@
           <p:cNvPr id="16" name="">
             <a:extLst xmlns:a="http://schemas.openxmlformats.org/drawingml/2006/main">
               <a:ext uri="{FF2B5EF4-FFF2-40B4-BE49-F238E27FC236}">
-                <a16:creationId xmlns:a16="http://schemas.microsoft.com/office/drawing/2014/main" id="{4247F2B5-D439-4397-93CE-1A83B9ABCFCB}"/>
+                <a16:creationId xmlns:a16="http://schemas.microsoft.com/office/drawing/2014/main" id="{B23A5E18-090B-47C6-A497-76327751F768}"/>
               </a:ext>
             </a:extLst>
           </p:cNvPr>
@@ -4083,7 +4083,7 @@
           <p:cNvPr id="17" name="">
             <a:extLst xmlns:a="http://schemas.openxmlformats.org/drawingml/2006/main">
               <a:ext uri="{FF2B5EF4-FFF2-40B4-BE49-F238E27FC236}">
-                <a16:creationId xmlns:a16="http://schemas.microsoft.com/office/drawing/2014/main" id="{FDBB9AB9-42F4-4A3A-BD57-2B38B3079715}"/>
+                <a16:creationId xmlns:a16="http://schemas.microsoft.com/office/drawing/2014/main" id="{6FEDBB77-2811-406E-8E87-BC519F3DB88E}"/>
               </a:ext>
             </a:extLst>
           </p:cNvPr>
@@ -4140,7 +4140,7 @@
           <p:cNvPr id="18" name="">
             <a:extLst xmlns:a="http://schemas.openxmlformats.org/drawingml/2006/main">
               <a:ext uri="{FF2B5EF4-FFF2-40B4-BE49-F238E27FC236}">
-                <a16:creationId xmlns:a16="http://schemas.microsoft.com/office/drawing/2014/main" id="{ECC2E462-6C56-45E8-B715-16599F2A8A2F}"/>
+                <a16:creationId xmlns:a16="http://schemas.microsoft.com/office/drawing/2014/main" id="{81FD16FC-6BD8-4BE1-8BAF-9183835B38D9}"/>
               </a:ext>
             </a:extLst>
           </p:cNvPr>
@@ -4195,7 +4195,7 @@
     </p:spTree>
     <p:extLst>
       <p:ext uri="{BB962C8B-B14F-4D97-AF65-F5344CB8AC3E}">
-        <p14:creationId xmlns:p14="http://schemas.microsoft.com/office/powerpoint/2010/main" val="248372087"/>
+        <p14:creationId xmlns:p14="http://schemas.microsoft.com/office/powerpoint/2010/main" val="334737914"/>
       </p:ext>
     </p:extLst>
   </p:cSld>
@@ -4350,7 +4350,7 @@
           <p:cNvPr id="23" name="">
             <a:extLst xmlns:a="http://schemas.openxmlformats.org/drawingml/2006/main">
               <a:ext uri="{FF2B5EF4-FFF2-40B4-BE49-F238E27FC236}">
-                <a16:creationId xmlns:a16="http://schemas.microsoft.com/office/drawing/2014/main" id="{0734748A-9678-4547-BA3D-60B6DFDE42D6}"/>
+                <a16:creationId xmlns:a16="http://schemas.microsoft.com/office/drawing/2014/main" id="{2B34959B-1F34-4590-939A-27D811B93EF1}"/>
               </a:ext>
             </a:extLst>
           </p:cNvPr>
@@ -4382,7 +4382,7 @@
           <p:cNvPr id="2" name="">
             <a:extLst xmlns:a="http://schemas.openxmlformats.org/drawingml/2006/main">
               <a:ext uri="{FF2B5EF4-FFF2-40B4-BE49-F238E27FC236}">
-                <a16:creationId xmlns:a16="http://schemas.microsoft.com/office/drawing/2014/main" id="{BED00667-1DC0-4864-BA52-1DA2DA586778}"/>
+                <a16:creationId xmlns:a16="http://schemas.microsoft.com/office/drawing/2014/main" id="{194A4EA9-8028-4283-97EF-A1025C1905B6}"/>
               </a:ext>
             </a:extLst>
           </p:cNvPr>
@@ -4439,7 +4439,7 @@
           <p:cNvPr id="3" name="">
             <a:extLst xmlns:a="http://schemas.openxmlformats.org/drawingml/2006/main">
               <a:ext uri="{FF2B5EF4-FFF2-40B4-BE49-F238E27FC236}">
-                <a16:creationId xmlns:a16="http://schemas.microsoft.com/office/drawing/2014/main" id="{ACF2A147-2250-4E04-ACD2-2AF6D4BCAFCD}"/>
+                <a16:creationId xmlns:a16="http://schemas.microsoft.com/office/drawing/2014/main" id="{F28A408E-0C0D-4A36-B2E3-24000B6CF5E1}"/>
               </a:ext>
             </a:extLst>
           </p:cNvPr>
@@ -4471,7 +4471,7 @@
           <p:cNvPr id="4" name="">
             <a:extLst xmlns:a="http://schemas.openxmlformats.org/drawingml/2006/main">
               <a:ext uri="{FF2B5EF4-FFF2-40B4-BE49-F238E27FC236}">
-                <a16:creationId xmlns:a16="http://schemas.microsoft.com/office/drawing/2014/main" id="{7FA43625-51F6-437D-AB16-E7AC628745D0}"/>
+                <a16:creationId xmlns:a16="http://schemas.microsoft.com/office/drawing/2014/main" id="{6FE73CC8-87B5-4F81-B1AB-16F2B833919B}"/>
               </a:ext>
             </a:extLst>
           </p:cNvPr>
@@ -4528,7 +4528,7 @@
           <p:cNvPr id="5" name="">
             <a:extLst xmlns:a="http://schemas.openxmlformats.org/drawingml/2006/main">
               <a:ext uri="{FF2B5EF4-FFF2-40B4-BE49-F238E27FC236}">
-                <a16:creationId xmlns:a16="http://schemas.microsoft.com/office/drawing/2014/main" id="{B5E1AF8C-26D1-4B8A-B963-EB4470DE97FC}"/>
+                <a16:creationId xmlns:a16="http://schemas.microsoft.com/office/drawing/2014/main" id="{7B16B11C-F371-479E-A857-5458B220B282}"/>
               </a:ext>
             </a:extLst>
           </p:cNvPr>
@@ -4585,7 +4585,7 @@
           <p:cNvPr id="6" name="">
             <a:extLst xmlns:a="http://schemas.openxmlformats.org/drawingml/2006/main">
               <a:ext uri="{FF2B5EF4-FFF2-40B4-BE49-F238E27FC236}">
-                <a16:creationId xmlns:a16="http://schemas.microsoft.com/office/drawing/2014/main" id="{7A8B643D-12E8-4CC1-BB26-971E85A998BA}"/>
+                <a16:creationId xmlns:a16="http://schemas.microsoft.com/office/drawing/2014/main" id="{93BD7ACB-5C11-44C1-9F08-0FAECF03EDAE}"/>
               </a:ext>
             </a:extLst>
           </p:cNvPr>
@@ -4642,7 +4642,7 @@
           <p:cNvPr id="7" name="">
             <a:extLst xmlns:a="http://schemas.openxmlformats.org/drawingml/2006/main">
               <a:ext uri="{FF2B5EF4-FFF2-40B4-BE49-F238E27FC236}">
-                <a16:creationId xmlns:a16="http://schemas.microsoft.com/office/drawing/2014/main" id="{9905A0E4-47D2-4CE2-9820-703620DE599B}"/>
+                <a16:creationId xmlns:a16="http://schemas.microsoft.com/office/drawing/2014/main" id="{1C635B6D-655D-4846-81BA-537D41C4EC86}"/>
               </a:ext>
             </a:extLst>
           </p:cNvPr>
@@ -4674,7 +4674,7 @@
           <p:cNvPr id="8" name="">
             <a:extLst xmlns:a="http://schemas.openxmlformats.org/drawingml/2006/main">
               <a:ext uri="{FF2B5EF4-FFF2-40B4-BE49-F238E27FC236}">
-                <a16:creationId xmlns:a16="http://schemas.microsoft.com/office/drawing/2014/main" id="{3F75E2F7-2469-485B-97E6-7CA2831EC8F7}"/>
+                <a16:creationId xmlns:a16="http://schemas.microsoft.com/office/drawing/2014/main" id="{E6B4E4DE-B328-4190-AC3F-FF00391BD7A8}"/>
               </a:ext>
             </a:extLst>
           </p:cNvPr>
@@ -4731,7 +4731,7 @@
           <p:cNvPr id="9" name="">
             <a:extLst xmlns:a="http://schemas.openxmlformats.org/drawingml/2006/main">
               <a:ext uri="{FF2B5EF4-FFF2-40B4-BE49-F238E27FC236}">
-                <a16:creationId xmlns:a16="http://schemas.microsoft.com/office/drawing/2014/main" id="{37FE4845-35F7-4E1D-BB2F-FF15647DEDE4}"/>
+                <a16:creationId xmlns:a16="http://schemas.microsoft.com/office/drawing/2014/main" id="{67558A3E-D8CD-434F-A2AB-0FF2D5A6439A}"/>
               </a:ext>
             </a:extLst>
           </p:cNvPr>
@@ -4788,7 +4788,7 @@
           <p:cNvPr id="10" name="">
             <a:extLst xmlns:a="http://schemas.openxmlformats.org/drawingml/2006/main">
               <a:ext uri="{FF2B5EF4-FFF2-40B4-BE49-F238E27FC236}">
-                <a16:creationId xmlns:a16="http://schemas.microsoft.com/office/drawing/2014/main" id="{8C5781A8-03F3-4095-8D79-35DD04542328}"/>
+                <a16:creationId xmlns:a16="http://schemas.microsoft.com/office/drawing/2014/main" id="{3E205293-0027-4A68-A37F-E54338579435}"/>
               </a:ext>
             </a:extLst>
           </p:cNvPr>
@@ -4822,7 +4822,7 @@
           <p:cNvPr id="11" name="">
             <a:extLst xmlns:a="http://schemas.openxmlformats.org/drawingml/2006/main">
               <a:ext uri="{FF2B5EF4-FFF2-40B4-BE49-F238E27FC236}">
-                <a16:creationId xmlns:a16="http://schemas.microsoft.com/office/drawing/2014/main" id="{F666CDD7-4928-4976-B3FD-E09863D45DC8}"/>
+                <a16:creationId xmlns:a16="http://schemas.microsoft.com/office/drawing/2014/main" id="{6B6EF713-DC54-4245-A0E2-5367B81DF134}"/>
               </a:ext>
             </a:extLst>
           </p:cNvPr>
@@ -4854,7 +4854,7 @@
           <p:cNvPr id="12" name="">
             <a:extLst xmlns:a="http://schemas.openxmlformats.org/drawingml/2006/main">
               <a:ext uri="{FF2B5EF4-FFF2-40B4-BE49-F238E27FC236}">
-                <a16:creationId xmlns:a16="http://schemas.microsoft.com/office/drawing/2014/main" id="{28AEA150-CEE7-449F-8DE5-80B0089C05FA}"/>
+                <a16:creationId xmlns:a16="http://schemas.microsoft.com/office/drawing/2014/main" id="{5E0FCC3C-D8F2-441D-A471-6F2754B4145D}"/>
               </a:ext>
             </a:extLst>
           </p:cNvPr>
@@ -4911,7 +4911,7 @@
           <p:cNvPr id="13" name="">
             <a:extLst xmlns:a="http://schemas.openxmlformats.org/drawingml/2006/main">
               <a:ext uri="{FF2B5EF4-FFF2-40B4-BE49-F238E27FC236}">
-                <a16:creationId xmlns:a16="http://schemas.microsoft.com/office/drawing/2014/main" id="{6C0173D8-D0B7-47BA-80FF-FD10E709812E}"/>
+                <a16:creationId xmlns:a16="http://schemas.microsoft.com/office/drawing/2014/main" id="{07C43339-1C1B-4520-902D-2DE79509F23A}"/>
               </a:ext>
             </a:extLst>
           </p:cNvPr>
@@ -4968,7 +4968,7 @@
           <p:cNvPr id="14" name="">
             <a:extLst xmlns:a="http://schemas.openxmlformats.org/drawingml/2006/main">
               <a:ext uri="{FF2B5EF4-FFF2-40B4-BE49-F238E27FC236}">
-                <a16:creationId xmlns:a16="http://schemas.microsoft.com/office/drawing/2014/main" id="{70F92090-BBBD-4A6B-BB9D-5A00FC6AF7EC}"/>
+                <a16:creationId xmlns:a16="http://schemas.microsoft.com/office/drawing/2014/main" id="{F6CBFAA8-7656-4E72-ACBD-2D17D8424686}"/>
               </a:ext>
             </a:extLst>
           </p:cNvPr>
@@ -5002,7 +5002,7 @@
           <p:cNvPr id="15" name="">
             <a:extLst xmlns:a="http://schemas.openxmlformats.org/drawingml/2006/main">
               <a:ext uri="{FF2B5EF4-FFF2-40B4-BE49-F238E27FC236}">
-                <a16:creationId xmlns:a16="http://schemas.microsoft.com/office/drawing/2014/main" id="{BF610A25-32FB-4512-BF3E-77DDF85B4615}"/>
+                <a16:creationId xmlns:a16="http://schemas.microsoft.com/office/drawing/2014/main" id="{7E12305E-1711-4058-9576-005FD99DFE13}"/>
               </a:ext>
             </a:extLst>
           </p:cNvPr>
@@ -5034,7 +5034,7 @@
           <p:cNvPr id="16" name="">
             <a:extLst xmlns:a="http://schemas.openxmlformats.org/drawingml/2006/main">
               <a:ext uri="{FF2B5EF4-FFF2-40B4-BE49-F238E27FC236}">
-                <a16:creationId xmlns:a16="http://schemas.microsoft.com/office/drawing/2014/main" id="{752CFFF8-29AC-483C-85E3-7895848EB678}"/>
+                <a16:creationId xmlns:a16="http://schemas.microsoft.com/office/drawing/2014/main" id="{CD897582-C3B6-4AF1-A517-8DA4E5F8FC95}"/>
               </a:ext>
             </a:extLst>
           </p:cNvPr>
@@ -5091,7 +5091,7 @@
           <p:cNvPr id="17" name="">
             <a:extLst xmlns:a="http://schemas.openxmlformats.org/drawingml/2006/main">
               <a:ext uri="{FF2B5EF4-FFF2-40B4-BE49-F238E27FC236}">
-                <a16:creationId xmlns:a16="http://schemas.microsoft.com/office/drawing/2014/main" id="{F558D6EC-B718-4515-8F94-FFF183F304CA}"/>
+                <a16:creationId xmlns:a16="http://schemas.microsoft.com/office/drawing/2014/main" id="{8697BD83-DD1F-493D-BD9A-34BE2DCAD38D}"/>
               </a:ext>
             </a:extLst>
           </p:cNvPr>
@@ -5148,7 +5148,7 @@
           <p:cNvPr id="18" name="">
             <a:extLst xmlns:a="http://schemas.openxmlformats.org/drawingml/2006/main">
               <a:ext uri="{FF2B5EF4-FFF2-40B4-BE49-F238E27FC236}">
-                <a16:creationId xmlns:a16="http://schemas.microsoft.com/office/drawing/2014/main" id="{AFC8D9B4-5625-4580-8AE8-47DCD4908C3F}"/>
+                <a16:creationId xmlns:a16="http://schemas.microsoft.com/office/drawing/2014/main" id="{F9245E41-4E78-44A5-9A86-87D6B1F003D9}"/>
               </a:ext>
             </a:extLst>
           </p:cNvPr>
@@ -5182,7 +5182,7 @@
           <p:cNvPr id="19" name="">
             <a:extLst xmlns:a="http://schemas.openxmlformats.org/drawingml/2006/main">
               <a:ext uri="{FF2B5EF4-FFF2-40B4-BE49-F238E27FC236}">
-                <a16:creationId xmlns:a16="http://schemas.microsoft.com/office/drawing/2014/main" id="{941C85CB-8F73-4855-ACD2-CBE44F273F82}"/>
+                <a16:creationId xmlns:a16="http://schemas.microsoft.com/office/drawing/2014/main" id="{CD16A335-12B1-4F91-9F15-CE09A4CA84A2}"/>
               </a:ext>
             </a:extLst>
           </p:cNvPr>
@@ -5214,7 +5214,7 @@
           <p:cNvPr id="20" name="">
             <a:extLst xmlns:a="http://schemas.openxmlformats.org/drawingml/2006/main">
               <a:ext uri="{FF2B5EF4-FFF2-40B4-BE49-F238E27FC236}">
-                <a16:creationId xmlns:a16="http://schemas.microsoft.com/office/drawing/2014/main" id="{0B6F0C8B-F29C-4E61-AC50-6ED034C62CF8}"/>
+                <a16:creationId xmlns:a16="http://schemas.microsoft.com/office/drawing/2014/main" id="{77D3D854-22CF-49A3-A9D3-7D42B2ACE4FD}"/>
               </a:ext>
             </a:extLst>
           </p:cNvPr>
@@ -5271,7 +5271,7 @@
           <p:cNvPr id="21" name="">
             <a:extLst xmlns:a="http://schemas.openxmlformats.org/drawingml/2006/main">
               <a:ext uri="{FF2B5EF4-FFF2-40B4-BE49-F238E27FC236}">
-                <a16:creationId xmlns:a16="http://schemas.microsoft.com/office/drawing/2014/main" id="{0607C34C-E6F4-44C2-9CFF-B7194AA65CC6}"/>
+                <a16:creationId xmlns:a16="http://schemas.microsoft.com/office/drawing/2014/main" id="{9384C71D-D7CD-431C-A009-2D3895FBA90B}"/>
               </a:ext>
             </a:extLst>
           </p:cNvPr>
@@ -5328,7 +5328,7 @@
           <p:cNvPr id="22" name="">
             <a:extLst xmlns:a="http://schemas.openxmlformats.org/drawingml/2006/main">
               <a:ext uri="{FF2B5EF4-FFF2-40B4-BE49-F238E27FC236}">
-                <a16:creationId xmlns:a16="http://schemas.microsoft.com/office/drawing/2014/main" id="{FF43D085-4F02-4D93-BE94-24E3A7366EE6}"/>
+                <a16:creationId xmlns:a16="http://schemas.microsoft.com/office/drawing/2014/main" id="{D2F4A732-4C78-497A-9C36-55D81C5C3662}"/>
               </a:ext>
             </a:extLst>
           </p:cNvPr>
@@ -5383,7 +5383,7 @@
     </p:spTree>
     <p:extLst>
       <p:ext uri="{BB962C8B-B14F-4D97-AF65-F5344CB8AC3E}">
-        <p14:creationId xmlns:p14="http://schemas.microsoft.com/office/powerpoint/2010/main" val="921500207"/>
+        <p14:creationId xmlns:p14="http://schemas.microsoft.com/office/powerpoint/2010/main" val="686727061"/>
       </p:ext>
     </p:extLst>
   </p:cSld>
@@ -5584,7 +5584,7 @@
           <p:cNvPr id="23" name="">
             <a:extLst xmlns:a="http://schemas.openxmlformats.org/drawingml/2006/main">
               <a:ext uri="{FF2B5EF4-FFF2-40B4-BE49-F238E27FC236}">
-                <a16:creationId xmlns:a16="http://schemas.microsoft.com/office/drawing/2014/main" id="{75D1A9CE-5419-4E5E-8991-76637B9AD2D9}"/>
+                <a16:creationId xmlns:a16="http://schemas.microsoft.com/office/drawing/2014/main" id="{6140680B-0FF3-4F2A-AA33-8500C3946076}"/>
               </a:ext>
             </a:extLst>
           </p:cNvPr>
@@ -5616,7 +5616,7 @@
           <p:cNvPr id="2" name="">
             <a:extLst xmlns:a="http://schemas.openxmlformats.org/drawingml/2006/main">
               <a:ext uri="{FF2B5EF4-FFF2-40B4-BE49-F238E27FC236}">
-                <a16:creationId xmlns:a16="http://schemas.microsoft.com/office/drawing/2014/main" id="{642281A6-C05C-4FE9-93B5-7D57E788C5F4}"/>
+                <a16:creationId xmlns:a16="http://schemas.microsoft.com/office/drawing/2014/main" id="{5EC492DE-8442-43B0-948E-3FE3D0B45A3D}"/>
               </a:ext>
             </a:extLst>
           </p:cNvPr>
@@ -5673,7 +5673,7 @@
           <p:cNvPr id="3" name="">
             <a:extLst xmlns:a="http://schemas.openxmlformats.org/drawingml/2006/main">
               <a:ext uri="{FF2B5EF4-FFF2-40B4-BE49-F238E27FC236}">
-                <a16:creationId xmlns:a16="http://schemas.microsoft.com/office/drawing/2014/main" id="{2F0D3FEE-9465-4D05-904D-378A9B96E73E}"/>
+                <a16:creationId xmlns:a16="http://schemas.microsoft.com/office/drawing/2014/main" id="{980A9097-4ACB-48D4-998F-725025C8185C}"/>
               </a:ext>
             </a:extLst>
           </p:cNvPr>
@@ -5705,7 +5705,7 @@
           <p:cNvPr id="4" name="">
             <a:extLst xmlns:a="http://schemas.openxmlformats.org/drawingml/2006/main">
               <a:ext uri="{FF2B5EF4-FFF2-40B4-BE49-F238E27FC236}">
-                <a16:creationId xmlns:a16="http://schemas.microsoft.com/office/drawing/2014/main" id="{7A9A1761-8F8B-4816-9026-1F83A5B61E80}"/>
+                <a16:creationId xmlns:a16="http://schemas.microsoft.com/office/drawing/2014/main" id="{5B7B74DB-9737-4027-8DB0-4039AD130EEB}"/>
               </a:ext>
             </a:extLst>
           </p:cNvPr>
@@ -5762,7 +5762,7 @@
           <p:cNvPr id="5" name="">
             <a:extLst xmlns:a="http://schemas.openxmlformats.org/drawingml/2006/main">
               <a:ext uri="{FF2B5EF4-FFF2-40B4-BE49-F238E27FC236}">
-                <a16:creationId xmlns:a16="http://schemas.microsoft.com/office/drawing/2014/main" id="{0E895E5A-DB75-4285-BE33-B4B382E608DD}"/>
+                <a16:creationId xmlns:a16="http://schemas.microsoft.com/office/drawing/2014/main" id="{9E81570E-E040-405E-924B-3F82FA8A93DD}"/>
               </a:ext>
             </a:extLst>
           </p:cNvPr>
@@ -5819,7 +5819,7 @@
           <p:cNvPr id="6" name="">
             <a:extLst xmlns:a="http://schemas.openxmlformats.org/drawingml/2006/main">
               <a:ext uri="{FF2B5EF4-FFF2-40B4-BE49-F238E27FC236}">
-                <a16:creationId xmlns:a16="http://schemas.microsoft.com/office/drawing/2014/main" id="{622796B2-956B-4433-B5FF-E7B1DA5526EF}"/>
+                <a16:creationId xmlns:a16="http://schemas.microsoft.com/office/drawing/2014/main" id="{B0041FCC-7E99-462C-B103-86F00D7A8C9E}"/>
               </a:ext>
             </a:extLst>
           </p:cNvPr>
@@ -5876,7 +5876,7 @@
           <p:cNvPr id="7" name="">
             <a:extLst xmlns:a="http://schemas.openxmlformats.org/drawingml/2006/main">
               <a:ext uri="{FF2B5EF4-FFF2-40B4-BE49-F238E27FC236}">
-                <a16:creationId xmlns:a16="http://schemas.microsoft.com/office/drawing/2014/main" id="{CE961B67-FE19-4B9D-AB6F-8D8555A7DDC1}"/>
+                <a16:creationId xmlns:a16="http://schemas.microsoft.com/office/drawing/2014/main" id="{C9D7796C-A338-442B-A4EC-59B5DCF0D8BB}"/>
               </a:ext>
             </a:extLst>
           </p:cNvPr>
@@ -5908,7 +5908,7 @@
           <p:cNvPr id="8" name="">
             <a:extLst xmlns:a="http://schemas.openxmlformats.org/drawingml/2006/main">
               <a:ext uri="{FF2B5EF4-FFF2-40B4-BE49-F238E27FC236}">
-                <a16:creationId xmlns:a16="http://schemas.microsoft.com/office/drawing/2014/main" id="{FA075F35-31A6-45B0-A656-37F46FA1C1F5}"/>
+                <a16:creationId xmlns:a16="http://schemas.microsoft.com/office/drawing/2014/main" id="{7AB67C73-F657-4B6F-968D-06CDAD6D263C}"/>
               </a:ext>
             </a:extLst>
           </p:cNvPr>
@@ -5965,7 +5965,7 @@
           <p:cNvPr id="9" name="">
             <a:extLst xmlns:a="http://schemas.openxmlformats.org/drawingml/2006/main">
               <a:ext uri="{FF2B5EF4-FFF2-40B4-BE49-F238E27FC236}">
-                <a16:creationId xmlns:a16="http://schemas.microsoft.com/office/drawing/2014/main" id="{75C8DEC6-1D22-497C-A643-28FEEEE20A23}"/>
+                <a16:creationId xmlns:a16="http://schemas.microsoft.com/office/drawing/2014/main" id="{0E0983AF-03C6-4A78-8E87-7C49808DE888}"/>
               </a:ext>
             </a:extLst>
           </p:cNvPr>
@@ -6022,7 +6022,7 @@
           <p:cNvPr id="10" name="">
             <a:extLst xmlns:a="http://schemas.openxmlformats.org/drawingml/2006/main">
               <a:ext uri="{FF2B5EF4-FFF2-40B4-BE49-F238E27FC236}">
-                <a16:creationId xmlns:a16="http://schemas.microsoft.com/office/drawing/2014/main" id="{F1C2B1DE-8B62-48E1-A800-7011FBE51230}"/>
+                <a16:creationId xmlns:a16="http://schemas.microsoft.com/office/drawing/2014/main" id="{57485ED2-7816-4422-9BDC-984605C1B73F}"/>
               </a:ext>
             </a:extLst>
           </p:cNvPr>
@@ -6056,7 +6056,7 @@
           <p:cNvPr id="11" name="">
             <a:extLst xmlns:a="http://schemas.openxmlformats.org/drawingml/2006/main">
               <a:ext uri="{FF2B5EF4-FFF2-40B4-BE49-F238E27FC236}">
-                <a16:creationId xmlns:a16="http://schemas.microsoft.com/office/drawing/2014/main" id="{73096FD3-88DD-4DF9-8B7A-8F16790A2D75}"/>
+                <a16:creationId xmlns:a16="http://schemas.microsoft.com/office/drawing/2014/main" id="{34F53C0C-42AC-418B-A972-7D8F68B884C1}"/>
               </a:ext>
             </a:extLst>
           </p:cNvPr>
@@ -6088,7 +6088,7 @@
           <p:cNvPr id="12" name="">
             <a:extLst xmlns:a="http://schemas.openxmlformats.org/drawingml/2006/main">
               <a:ext uri="{FF2B5EF4-FFF2-40B4-BE49-F238E27FC236}">
-                <a16:creationId xmlns:a16="http://schemas.microsoft.com/office/drawing/2014/main" id="{A7EF4A2E-046E-4F6F-B528-BB19975FA114}"/>
+                <a16:creationId xmlns:a16="http://schemas.microsoft.com/office/drawing/2014/main" id="{D3AF5487-F680-4D64-891B-DD872B49FDF6}"/>
               </a:ext>
             </a:extLst>
           </p:cNvPr>
@@ -6145,7 +6145,7 @@
           <p:cNvPr id="13" name="">
             <a:extLst xmlns:a="http://schemas.openxmlformats.org/drawingml/2006/main">
               <a:ext uri="{FF2B5EF4-FFF2-40B4-BE49-F238E27FC236}">
-                <a16:creationId xmlns:a16="http://schemas.microsoft.com/office/drawing/2014/main" id="{FE07BE3F-C672-44F1-91BC-BF5CEB8E1ADC}"/>
+                <a16:creationId xmlns:a16="http://schemas.microsoft.com/office/drawing/2014/main" id="{0B1294CB-7642-4DE8-B9CF-913055B9BDE3}"/>
               </a:ext>
             </a:extLst>
           </p:cNvPr>
@@ -6202,7 +6202,7 @@
           <p:cNvPr id="14" name="">
             <a:extLst xmlns:a="http://schemas.openxmlformats.org/drawingml/2006/main">
               <a:ext uri="{FF2B5EF4-FFF2-40B4-BE49-F238E27FC236}">
-                <a16:creationId xmlns:a16="http://schemas.microsoft.com/office/drawing/2014/main" id="{16303691-D5C4-498F-A533-A47CC11A48D1}"/>
+                <a16:creationId xmlns:a16="http://schemas.microsoft.com/office/drawing/2014/main" id="{0456A4B6-9FE8-4662-98F6-D1E0FFE3C0A3}"/>
               </a:ext>
             </a:extLst>
           </p:cNvPr>
@@ -6236,7 +6236,7 @@
           <p:cNvPr id="15" name="">
             <a:extLst xmlns:a="http://schemas.openxmlformats.org/drawingml/2006/main">
               <a:ext uri="{FF2B5EF4-FFF2-40B4-BE49-F238E27FC236}">
-                <a16:creationId xmlns:a16="http://schemas.microsoft.com/office/drawing/2014/main" id="{2F8836A7-D2A2-425C-ABDC-142BCCFEBF94}"/>
+                <a16:creationId xmlns:a16="http://schemas.microsoft.com/office/drawing/2014/main" id="{50B56CFE-13D9-430D-9345-D5EC85561F65}"/>
               </a:ext>
             </a:extLst>
           </p:cNvPr>
@@ -6268,7 +6268,7 @@
           <p:cNvPr id="16" name="">
             <a:extLst xmlns:a="http://schemas.openxmlformats.org/drawingml/2006/main">
               <a:ext uri="{FF2B5EF4-FFF2-40B4-BE49-F238E27FC236}">
-                <a16:creationId xmlns:a16="http://schemas.microsoft.com/office/drawing/2014/main" id="{B6B02008-B15E-46F4-8767-9BA2C0E35835}"/>
+                <a16:creationId xmlns:a16="http://schemas.microsoft.com/office/drawing/2014/main" id="{0926376D-BFEA-4DC1-9D90-5548E33C3C64}"/>
               </a:ext>
             </a:extLst>
           </p:cNvPr>
@@ -6325,7 +6325,7 @@
           <p:cNvPr id="17" name="">
             <a:extLst xmlns:a="http://schemas.openxmlformats.org/drawingml/2006/main">
               <a:ext uri="{FF2B5EF4-FFF2-40B4-BE49-F238E27FC236}">
-                <a16:creationId xmlns:a16="http://schemas.microsoft.com/office/drawing/2014/main" id="{CA5B09EF-A55E-4F96-9AB5-1181358CCC2B}"/>
+                <a16:creationId xmlns:a16="http://schemas.microsoft.com/office/drawing/2014/main" id="{1348A833-5F66-477B-A000-9F8EC112C8C3}"/>
               </a:ext>
             </a:extLst>
           </p:cNvPr>
@@ -6382,7 +6382,7 @@
           <p:cNvPr id="18" name="">
             <a:extLst xmlns:a="http://schemas.openxmlformats.org/drawingml/2006/main">
               <a:ext uri="{FF2B5EF4-FFF2-40B4-BE49-F238E27FC236}">
-                <a16:creationId xmlns:a16="http://schemas.microsoft.com/office/drawing/2014/main" id="{1BE120C2-22C8-42B3-A401-A625D3BD1AE5}"/>
+                <a16:creationId xmlns:a16="http://schemas.microsoft.com/office/drawing/2014/main" id="{8C0F4BA1-F18F-43E4-9813-FD6CC705802F}"/>
               </a:ext>
             </a:extLst>
           </p:cNvPr>
@@ -6416,7 +6416,7 @@
           <p:cNvPr id="19" name="">
             <a:extLst xmlns:a="http://schemas.openxmlformats.org/drawingml/2006/main">
               <a:ext uri="{FF2B5EF4-FFF2-40B4-BE49-F238E27FC236}">
-                <a16:creationId xmlns:a16="http://schemas.microsoft.com/office/drawing/2014/main" id="{0C2A5272-008B-43A7-BF86-F2A0C6A6C01D}"/>
+                <a16:creationId xmlns:a16="http://schemas.microsoft.com/office/drawing/2014/main" id="{625CF3C4-E777-4611-8150-D80B6D2DAD12}"/>
               </a:ext>
             </a:extLst>
           </p:cNvPr>
@@ -6448,7 +6448,7 @@
           <p:cNvPr id="20" name="">
             <a:extLst xmlns:a="http://schemas.openxmlformats.org/drawingml/2006/main">
               <a:ext uri="{FF2B5EF4-FFF2-40B4-BE49-F238E27FC236}">
-                <a16:creationId xmlns:a16="http://schemas.microsoft.com/office/drawing/2014/main" id="{C3E7F0AB-FF48-481C-A502-7508EA8E6BC3}"/>
+                <a16:creationId xmlns:a16="http://schemas.microsoft.com/office/drawing/2014/main" id="{A450BEA7-0EDA-4A46-ABC0-09CBBA38D957}"/>
               </a:ext>
             </a:extLst>
           </p:cNvPr>
@@ -6505,7 +6505,7 @@
           <p:cNvPr id="21" name="">
             <a:extLst xmlns:a="http://schemas.openxmlformats.org/drawingml/2006/main">
               <a:ext uri="{FF2B5EF4-FFF2-40B4-BE49-F238E27FC236}">
-                <a16:creationId xmlns:a16="http://schemas.microsoft.com/office/drawing/2014/main" id="{07BE165B-5DE3-4C60-B4F0-136F5355BE3D}"/>
+                <a16:creationId xmlns:a16="http://schemas.microsoft.com/office/drawing/2014/main" id="{B030CD3F-BA18-400C-8358-42B010B93DB5}"/>
               </a:ext>
             </a:extLst>
           </p:cNvPr>
@@ -6562,7 +6562,7 @@
           <p:cNvPr id="22" name="">
             <a:extLst xmlns:a="http://schemas.openxmlformats.org/drawingml/2006/main">
               <a:ext uri="{FF2B5EF4-FFF2-40B4-BE49-F238E27FC236}">
-                <a16:creationId xmlns:a16="http://schemas.microsoft.com/office/drawing/2014/main" id="{88CDBB5C-6A97-44E0-BC37-C9AE5B9C3B9A}"/>
+                <a16:creationId xmlns:a16="http://schemas.microsoft.com/office/drawing/2014/main" id="{C6CD60BF-30B2-4247-BBBD-40A581E209D5}"/>
               </a:ext>
             </a:extLst>
           </p:cNvPr>
@@ -6617,7 +6617,7 @@
     </p:spTree>
     <p:extLst>
       <p:ext uri="{BB962C8B-B14F-4D97-AF65-F5344CB8AC3E}">
-        <p14:creationId xmlns:p14="http://schemas.microsoft.com/office/powerpoint/2010/main" val="2056470883"/>
+        <p14:creationId xmlns:p14="http://schemas.microsoft.com/office/powerpoint/2010/main" val="2116659488"/>
       </p:ext>
     </p:extLst>
   </p:cSld>
@@ -6818,7 +6818,7 @@
           <p:cNvPr id="16" name="">
             <a:extLst xmlns:a="http://schemas.openxmlformats.org/drawingml/2006/main">
               <a:ext uri="{FF2B5EF4-FFF2-40B4-BE49-F238E27FC236}">
-                <a16:creationId xmlns:a16="http://schemas.microsoft.com/office/drawing/2014/main" id="{C55CE59B-35F4-433F-A6FA-4162D50F73CD}"/>
+                <a16:creationId xmlns:a16="http://schemas.microsoft.com/office/drawing/2014/main" id="{8716C6AE-C8DA-48B9-8DBD-35022315C44B}"/>
               </a:ext>
             </a:extLst>
           </p:cNvPr>
@@ -6850,7 +6850,7 @@
           <p:cNvPr id="2" name="">
             <a:extLst xmlns:a="http://schemas.openxmlformats.org/drawingml/2006/main">
               <a:ext uri="{FF2B5EF4-FFF2-40B4-BE49-F238E27FC236}">
-                <a16:creationId xmlns:a16="http://schemas.microsoft.com/office/drawing/2014/main" id="{8DC66BF6-2D50-4BBA-AB34-7E99DC29986C}"/>
+                <a16:creationId xmlns:a16="http://schemas.microsoft.com/office/drawing/2014/main" id="{9790DB92-37ED-480F-9C8D-B6347778A2E8}"/>
               </a:ext>
             </a:extLst>
           </p:cNvPr>
@@ -6907,7 +6907,7 @@
           <p:cNvPr id="3" name="">
             <a:extLst xmlns:a="http://schemas.openxmlformats.org/drawingml/2006/main">
               <a:ext uri="{FF2B5EF4-FFF2-40B4-BE49-F238E27FC236}">
-                <a16:creationId xmlns:a16="http://schemas.microsoft.com/office/drawing/2014/main" id="{BA8A5C01-CEDB-4A6A-98AB-C1A51ADAAE7C}"/>
+                <a16:creationId xmlns:a16="http://schemas.microsoft.com/office/drawing/2014/main" id="{900E3F01-E4AF-468B-98F1-3F52F146DDEE}"/>
               </a:ext>
             </a:extLst>
           </p:cNvPr>
@@ -6939,7 +6939,7 @@
           <p:cNvPr id="4" name="">
             <a:extLst xmlns:a="http://schemas.openxmlformats.org/drawingml/2006/main">
               <a:ext uri="{FF2B5EF4-FFF2-40B4-BE49-F238E27FC236}">
-                <a16:creationId xmlns:a16="http://schemas.microsoft.com/office/drawing/2014/main" id="{9560B4FB-1260-4AAF-A186-FDFB8BDA6DE8}"/>
+                <a16:creationId xmlns:a16="http://schemas.microsoft.com/office/drawing/2014/main" id="{BA207C6B-6AA5-4F1B-917F-B421DB6AAE90}"/>
               </a:ext>
             </a:extLst>
           </p:cNvPr>
@@ -6996,7 +6996,7 @@
           <p:cNvPr id="5" name="">
             <a:extLst xmlns:a="http://schemas.openxmlformats.org/drawingml/2006/main">
               <a:ext uri="{FF2B5EF4-FFF2-40B4-BE49-F238E27FC236}">
-                <a16:creationId xmlns:a16="http://schemas.microsoft.com/office/drawing/2014/main" id="{E2724B05-7CDB-493E-9EF6-4E2F538B8F65}"/>
+                <a16:creationId xmlns:a16="http://schemas.microsoft.com/office/drawing/2014/main" id="{C3C0A54E-4760-4859-AD15-CC66FA19F60A}"/>
               </a:ext>
             </a:extLst>
           </p:cNvPr>
@@ -7053,7 +7053,7 @@
           <p:cNvPr id="6" name="">
             <a:extLst xmlns:a="http://schemas.openxmlformats.org/drawingml/2006/main">
               <a:ext uri="{FF2B5EF4-FFF2-40B4-BE49-F238E27FC236}">
-                <a16:creationId xmlns:a16="http://schemas.microsoft.com/office/drawing/2014/main" id="{2C246282-039E-40EA-9224-C2DD44D8544D}"/>
+                <a16:creationId xmlns:a16="http://schemas.microsoft.com/office/drawing/2014/main" id="{3BA97B13-9908-4F4B-ACBD-B7316D26A923}"/>
               </a:ext>
             </a:extLst>
           </p:cNvPr>
@@ -7110,7 +7110,7 @@
           <p:cNvPr id="7" name="">
             <a:extLst xmlns:a="http://schemas.openxmlformats.org/drawingml/2006/main">
               <a:ext uri="{FF2B5EF4-FFF2-40B4-BE49-F238E27FC236}">
-                <a16:creationId xmlns:a16="http://schemas.microsoft.com/office/drawing/2014/main" id="{957A5952-6266-45C1-B27F-9640670D7C41}"/>
+                <a16:creationId xmlns:a16="http://schemas.microsoft.com/office/drawing/2014/main" id="{43362869-153D-4CAD-98AE-76108C83F075}"/>
               </a:ext>
             </a:extLst>
           </p:cNvPr>
@@ -7142,7 +7142,7 @@
           <p:cNvPr id="8" name="">
             <a:extLst xmlns:a="http://schemas.openxmlformats.org/drawingml/2006/main">
               <a:ext uri="{FF2B5EF4-FFF2-40B4-BE49-F238E27FC236}">
-                <a16:creationId xmlns:a16="http://schemas.microsoft.com/office/drawing/2014/main" id="{EAEF5AC7-F9D7-4808-B04D-913D42C0D378}"/>
+                <a16:creationId xmlns:a16="http://schemas.microsoft.com/office/drawing/2014/main" id="{D4C56ADA-60F4-44EE-A80A-DB60DEA5483C}"/>
               </a:ext>
             </a:extLst>
           </p:cNvPr>
@@ -7199,7 +7199,7 @@
           <p:cNvPr id="9" name="">
             <a:extLst xmlns:a="http://schemas.openxmlformats.org/drawingml/2006/main">
               <a:ext uri="{FF2B5EF4-FFF2-40B4-BE49-F238E27FC236}">
-                <a16:creationId xmlns:a16="http://schemas.microsoft.com/office/drawing/2014/main" id="{C5990D9F-A9E0-45B3-B621-F51EB0281936}"/>
+                <a16:creationId xmlns:a16="http://schemas.microsoft.com/office/drawing/2014/main" id="{74D305BF-E017-4086-B693-361B8194A20D}"/>
               </a:ext>
             </a:extLst>
           </p:cNvPr>
@@ -7256,7 +7256,7 @@
           <p:cNvPr id="10" name="">
             <a:extLst xmlns:a="http://schemas.openxmlformats.org/drawingml/2006/main">
               <a:ext uri="{FF2B5EF4-FFF2-40B4-BE49-F238E27FC236}">
-                <a16:creationId xmlns:a16="http://schemas.microsoft.com/office/drawing/2014/main" id="{9F53FC49-4301-43B1-9972-443F0D46E003}"/>
+                <a16:creationId xmlns:a16="http://schemas.microsoft.com/office/drawing/2014/main" id="{C14379BC-DADB-47C8-B4A7-0DEA006A5123}"/>
               </a:ext>
             </a:extLst>
           </p:cNvPr>
@@ -7313,7 +7313,7 @@
           <p:cNvPr id="11" name="">
             <a:extLst xmlns:a="http://schemas.openxmlformats.org/drawingml/2006/main">
               <a:ext uri="{FF2B5EF4-FFF2-40B4-BE49-F238E27FC236}">
-                <a16:creationId xmlns:a16="http://schemas.microsoft.com/office/drawing/2014/main" id="{A51C945E-3E57-4F15-9735-3DFAE3AAAEEF}"/>
+                <a16:creationId xmlns:a16="http://schemas.microsoft.com/office/drawing/2014/main" id="{97A20983-C34F-4E99-8732-DFFBA472EFA7}"/>
               </a:ext>
             </a:extLst>
           </p:cNvPr>
@@ -7345,7 +7345,7 @@
           <p:cNvPr id="12" name="">
             <a:extLst xmlns:a="http://schemas.openxmlformats.org/drawingml/2006/main">
               <a:ext uri="{FF2B5EF4-FFF2-40B4-BE49-F238E27FC236}">
-                <a16:creationId xmlns:a16="http://schemas.microsoft.com/office/drawing/2014/main" id="{B1616376-8F53-445F-88BA-7E8E572DBF26}"/>
+                <a16:creationId xmlns:a16="http://schemas.microsoft.com/office/drawing/2014/main" id="{9452AE93-BCEA-4F9A-8F59-39C9D68211E7}"/>
               </a:ext>
             </a:extLst>
           </p:cNvPr>
@@ -7402,7 +7402,7 @@
           <p:cNvPr id="13" name="">
             <a:extLst xmlns:a="http://schemas.openxmlformats.org/drawingml/2006/main">
               <a:ext uri="{FF2B5EF4-FFF2-40B4-BE49-F238E27FC236}">
-                <a16:creationId xmlns:a16="http://schemas.microsoft.com/office/drawing/2014/main" id="{679F8045-B41C-4C98-958F-A27AA6C2C1A9}"/>
+                <a16:creationId xmlns:a16="http://schemas.microsoft.com/office/drawing/2014/main" id="{62C0E21D-2EDE-4849-BC2B-2434D851F68B}"/>
               </a:ext>
             </a:extLst>
           </p:cNvPr>
@@ -7459,7 +7459,7 @@
           <p:cNvPr id="14" name="">
             <a:extLst xmlns:a="http://schemas.openxmlformats.org/drawingml/2006/main">
               <a:ext uri="{FF2B5EF4-FFF2-40B4-BE49-F238E27FC236}">
-                <a16:creationId xmlns:a16="http://schemas.microsoft.com/office/drawing/2014/main" id="{C1D9D15E-F578-41FA-82B4-A1CE55D4F829}"/>
+                <a16:creationId xmlns:a16="http://schemas.microsoft.com/office/drawing/2014/main" id="{40D85FEC-33C1-4978-9420-733458BF9971}"/>
               </a:ext>
             </a:extLst>
           </p:cNvPr>
@@ -7516,7 +7516,7 @@
           <p:cNvPr id="15" name="">
             <a:extLst xmlns:a="http://schemas.openxmlformats.org/drawingml/2006/main">
               <a:ext uri="{FF2B5EF4-FFF2-40B4-BE49-F238E27FC236}">
-                <a16:creationId xmlns:a16="http://schemas.microsoft.com/office/drawing/2014/main" id="{90D6CCFC-5CBE-4E10-A30D-3FCE91466AB6}"/>
+                <a16:creationId xmlns:a16="http://schemas.microsoft.com/office/drawing/2014/main" id="{51F93CB5-F535-4070-AE52-64645498DF96}"/>
               </a:ext>
             </a:extLst>
           </p:cNvPr>
@@ -7571,7 +7571,7 @@
     </p:spTree>
     <p:extLst>
       <p:ext uri="{BB962C8B-B14F-4D97-AF65-F5344CB8AC3E}">
-        <p14:creationId xmlns:p14="http://schemas.microsoft.com/office/powerpoint/2010/main" val="533848158"/>
+        <p14:creationId xmlns:p14="http://schemas.microsoft.com/office/powerpoint/2010/main" val="1622214834"/>
       </p:ext>
     </p:extLst>
   </p:cSld>
@@ -7772,7 +7772,7 @@
           <p:cNvPr id="23" name="">
             <a:extLst xmlns:a="http://schemas.openxmlformats.org/drawingml/2006/main">
               <a:ext uri="{FF2B5EF4-FFF2-40B4-BE49-F238E27FC236}">
-                <a16:creationId xmlns:a16="http://schemas.microsoft.com/office/drawing/2014/main" id="{71D4DC4B-4D78-4B0E-A209-19C02AB0D178}"/>
+                <a16:creationId xmlns:a16="http://schemas.microsoft.com/office/drawing/2014/main" id="{6341D73A-DF7A-41C7-A4D8-A5BF9F8B809A}"/>
               </a:ext>
             </a:extLst>
           </p:cNvPr>
@@ -7804,7 +7804,7 @@
           <p:cNvPr id="2" name="">
             <a:extLst xmlns:a="http://schemas.openxmlformats.org/drawingml/2006/main">
               <a:ext uri="{FF2B5EF4-FFF2-40B4-BE49-F238E27FC236}">
-                <a16:creationId xmlns:a16="http://schemas.microsoft.com/office/drawing/2014/main" id="{230D4453-AE8C-4D4F-9FA9-A72740BDDE24}"/>
+                <a16:creationId xmlns:a16="http://schemas.microsoft.com/office/drawing/2014/main" id="{FE3C6DEE-D7FD-4AA2-856B-211828F2BBBA}"/>
               </a:ext>
             </a:extLst>
           </p:cNvPr>
@@ -7861,7 +7861,7 @@
           <p:cNvPr id="3" name="">
             <a:extLst xmlns:a="http://schemas.openxmlformats.org/drawingml/2006/main">
               <a:ext uri="{FF2B5EF4-FFF2-40B4-BE49-F238E27FC236}">
-                <a16:creationId xmlns:a16="http://schemas.microsoft.com/office/drawing/2014/main" id="{56AAB1EE-9F51-4084-BC64-5CDEFB0721EE}"/>
+                <a16:creationId xmlns:a16="http://schemas.microsoft.com/office/drawing/2014/main" id="{79AD7711-5FD2-47DC-8877-A3ED7E6F8E1E}"/>
               </a:ext>
             </a:extLst>
           </p:cNvPr>
@@ -7893,7 +7893,7 @@
           <p:cNvPr id="4" name="">
             <a:extLst xmlns:a="http://schemas.openxmlformats.org/drawingml/2006/main">
               <a:ext uri="{FF2B5EF4-FFF2-40B4-BE49-F238E27FC236}">
-                <a16:creationId xmlns:a16="http://schemas.microsoft.com/office/drawing/2014/main" id="{14540726-FE6C-414B-A8E2-6FB66E48CF71}"/>
+                <a16:creationId xmlns:a16="http://schemas.microsoft.com/office/drawing/2014/main" id="{0F04CD04-6D70-4E66-BA5F-5B66563F6BAB}"/>
               </a:ext>
             </a:extLst>
           </p:cNvPr>
@@ -7950,7 +7950,7 @@
           <p:cNvPr id="5" name="">
             <a:extLst xmlns:a="http://schemas.openxmlformats.org/drawingml/2006/main">
               <a:ext uri="{FF2B5EF4-FFF2-40B4-BE49-F238E27FC236}">
-                <a16:creationId xmlns:a16="http://schemas.microsoft.com/office/drawing/2014/main" id="{CC1CFC0F-03D8-44E1-8DED-518AE170BD7C}"/>
+                <a16:creationId xmlns:a16="http://schemas.microsoft.com/office/drawing/2014/main" id="{2DC248AC-248F-4A29-B49A-A4C9584D5E89}"/>
               </a:ext>
             </a:extLst>
           </p:cNvPr>
@@ -8007,7 +8007,7 @@
           <p:cNvPr id="6" name="">
             <a:extLst xmlns:a="http://schemas.openxmlformats.org/drawingml/2006/main">
               <a:ext uri="{FF2B5EF4-FFF2-40B4-BE49-F238E27FC236}">
-                <a16:creationId xmlns:a16="http://schemas.microsoft.com/office/drawing/2014/main" id="{A2154099-8940-49B1-AFA8-FD380234250B}"/>
+                <a16:creationId xmlns:a16="http://schemas.microsoft.com/office/drawing/2014/main" id="{5E6E862F-3066-49DE-BE85-59A0AA1ACCA8}"/>
               </a:ext>
             </a:extLst>
           </p:cNvPr>
@@ -8064,7 +8064,7 @@
           <p:cNvPr id="7" name="">
             <a:extLst xmlns:a="http://schemas.openxmlformats.org/drawingml/2006/main">
               <a:ext uri="{FF2B5EF4-FFF2-40B4-BE49-F238E27FC236}">
-                <a16:creationId xmlns:a16="http://schemas.microsoft.com/office/drawing/2014/main" id="{55185DB2-8FEE-491A-83ED-ED39EA0D390D}"/>
+                <a16:creationId xmlns:a16="http://schemas.microsoft.com/office/drawing/2014/main" id="{42DC2864-C026-41C9-B0FC-A206195D1F20}"/>
               </a:ext>
             </a:extLst>
           </p:cNvPr>
@@ -8096,7 +8096,7 @@
           <p:cNvPr id="8" name="">
             <a:extLst xmlns:a="http://schemas.openxmlformats.org/drawingml/2006/main">
               <a:ext uri="{FF2B5EF4-FFF2-40B4-BE49-F238E27FC236}">
-                <a16:creationId xmlns:a16="http://schemas.microsoft.com/office/drawing/2014/main" id="{8DBCC557-5983-4B9F-969B-148BF6283084}"/>
+                <a16:creationId xmlns:a16="http://schemas.microsoft.com/office/drawing/2014/main" id="{FF396B5E-4931-4DE2-B39B-67E04615DF54}"/>
               </a:ext>
             </a:extLst>
           </p:cNvPr>
@@ -8153,7 +8153,7 @@
           <p:cNvPr id="9" name="">
             <a:extLst xmlns:a="http://schemas.openxmlformats.org/drawingml/2006/main">
               <a:ext uri="{FF2B5EF4-FFF2-40B4-BE49-F238E27FC236}">
-                <a16:creationId xmlns:a16="http://schemas.microsoft.com/office/drawing/2014/main" id="{BB1180DB-E85B-4C5A-9AE1-FD165FCA48E8}"/>
+                <a16:creationId xmlns:a16="http://schemas.microsoft.com/office/drawing/2014/main" id="{07F800E6-F0D2-407F-BD11-6BA8B573DD24}"/>
               </a:ext>
             </a:extLst>
           </p:cNvPr>
@@ -8210,19 +8210,19 @@
           <p:cNvPr id="10" name="">
             <a:extLst xmlns:a="http://schemas.openxmlformats.org/drawingml/2006/main">
               <a:ext uri="{FF2B5EF4-FFF2-40B4-BE49-F238E27FC236}">
-                <a16:creationId xmlns:a16="http://schemas.microsoft.com/office/drawing/2014/main" id="{99DC4037-9890-431F-A927-389161F7FA5B}"/>
-              </a:ext>
-            </a:extLst>
-          </p:cNvPr>
-          <p:cNvSpPr>
-            <a:spLocks xmlns:a="http://schemas.openxmlformats.org/drawingml/2006/main" noGrp="1"/>
-          </p:cNvSpPr>
-          <p:nvPr/>
-        </p:nvSpPr>
-        <p:spPr>
-          <a:xfrm xmlns:a="http://schemas.openxmlformats.org/drawingml/2006/main">
-            <a:off x="914400" y="1257300"/>
-            <a:ext cx="10363200" cy="781050"/>
+                <a16:creationId xmlns:a16="http://schemas.microsoft.com/office/drawing/2014/main" id="{9079D59E-47A3-41B1-8E0C-AE4F9C5C52F4}"/>
+              </a:ext>
+            </a:extLst>
+          </p:cNvPr>
+          <p:cNvSpPr>
+            <a:spLocks xmlns:a="http://schemas.openxmlformats.org/drawingml/2006/main" noGrp="1"/>
+          </p:cNvSpPr>
+          <p:nvPr/>
+        </p:nvSpPr>
+        <p:spPr>
+          <a:xfrm xmlns:a="http://schemas.openxmlformats.org/drawingml/2006/main">
+            <a:off x="857250" y="1219200"/>
+            <a:ext cx="10477500" cy="742950"/>
           </a:xfrm>
           <a:prstGeom xmlns:a="http://schemas.openxmlformats.org/drawingml/2006/main" prst="rect">
             <a:avLst/>
@@ -8239,7 +8239,7 @@
           <a:lstStyle xmlns:a="http://schemas.openxmlformats.org/drawingml/2006/main"/>
           <a:p xmlns:a="http://schemas.openxmlformats.org/drawingml/2006/main">
             <a:pPr algn="ctr">
-              <a:defRPr sz="2175" b="1">
+              <a:defRPr sz="2100" b="1">
                 <a:solidFill>
                   <a:srgbClr val="17253A"/>
                 </a:solidFill>
@@ -8249,7 +8249,7 @@
               </a:defRPr>
             </a:pPr>
             <a:r>
-              <a:rPr sz="2175" b="1">
+              <a:rPr sz="2100" b="1">
                 <a:solidFill>
                   <a:srgbClr val="17253A"/>
                 </a:solidFill>
@@ -8267,28 +8267,30 @@
           <p:cNvPr id="11" name="">
             <a:extLst xmlns:a="http://schemas.openxmlformats.org/drawingml/2006/main">
               <a:ext uri="{FF2B5EF4-FFF2-40B4-BE49-F238E27FC236}">
-                <a16:creationId xmlns:a16="http://schemas.microsoft.com/office/drawing/2014/main" id="{26211347-CF37-47EB-AAB1-298F6F52EF97}"/>
-              </a:ext>
-            </a:extLst>
-          </p:cNvPr>
-          <p:cNvSpPr>
-            <a:spLocks xmlns:a="http://schemas.openxmlformats.org/drawingml/2006/main" noGrp="1"/>
-          </p:cNvSpPr>
-          <p:nvPr/>
-        </p:nvSpPr>
-        <p:spPr>
-          <a:xfrm xmlns:a="http://schemas.openxmlformats.org/drawingml/2006/main">
-            <a:off x="1000125" y="2247900"/>
-            <a:ext cx="476250" cy="476250"/>
-          </a:xfrm>
-          <a:prstGeom xmlns:a="http://schemas.openxmlformats.org/drawingml/2006/main" prst="ellipse">
+                <a16:creationId xmlns:a16="http://schemas.microsoft.com/office/drawing/2014/main" id="{A47EE73E-064C-4489-9C15-A2287C688E5D}"/>
+              </a:ext>
+            </a:extLst>
+          </p:cNvPr>
+          <p:cNvSpPr>
+            <a:spLocks xmlns:a="http://schemas.openxmlformats.org/drawingml/2006/main" noGrp="1"/>
+          </p:cNvSpPr>
+          <p:nvPr/>
+        </p:nvSpPr>
+        <p:spPr>
+          <a:xfrm xmlns:a="http://schemas.openxmlformats.org/drawingml/2006/main">
+            <a:off x="971550" y="2124075"/>
+            <a:ext cx="38100" cy="3524250"/>
+          </a:xfrm>
+          <a:prstGeom xmlns:a="http://schemas.openxmlformats.org/drawingml/2006/main" prst="rect">
             <a:avLst/>
           </a:prstGeom>
           <a:solidFill xmlns:a="http://schemas.openxmlformats.org/drawingml/2006/main">
-            <a:srgbClr val="18324A"/>
+            <a:srgbClr val="2C6E73"/>
           </a:solidFill>
           <a:ln xmlns:a="http://schemas.openxmlformats.org/drawingml/2006/main" w="0">
-            <a:noFill/>
+            <a:solidFill>
+              <a:srgbClr val="2C6E73"/>
+            </a:solidFill>
           </a:ln>
         </p:spPr>
       </p:sp>
@@ -8297,19 +8299,19 @@
           <p:cNvPr id="12" name="">
             <a:extLst xmlns:a="http://schemas.openxmlformats.org/drawingml/2006/main">
               <a:ext uri="{FF2B5EF4-FFF2-40B4-BE49-F238E27FC236}">
-                <a16:creationId xmlns:a16="http://schemas.microsoft.com/office/drawing/2014/main" id="{9986AD03-8C8D-4B42-920B-ABEA11ED98B0}"/>
-              </a:ext>
-            </a:extLst>
-          </p:cNvPr>
-          <p:cNvSpPr>
-            <a:spLocks xmlns:a="http://schemas.openxmlformats.org/drawingml/2006/main" noGrp="1"/>
-          </p:cNvSpPr>
-          <p:nvPr/>
-        </p:nvSpPr>
-        <p:spPr>
-          <a:xfrm xmlns:a="http://schemas.openxmlformats.org/drawingml/2006/main">
-            <a:off x="1000125" y="2276475"/>
-            <a:ext cx="476250" cy="419100"/>
+                <a16:creationId xmlns:a16="http://schemas.microsoft.com/office/drawing/2014/main" id="{B00D2EB0-64B5-499D-8B20-9A764E4C101F}"/>
+              </a:ext>
+            </a:extLst>
+          </p:cNvPr>
+          <p:cNvSpPr>
+            <a:spLocks xmlns:a="http://schemas.openxmlformats.org/drawingml/2006/main" noGrp="1"/>
+          </p:cNvSpPr>
+          <p:nvPr/>
+        </p:nvSpPr>
+        <p:spPr>
+          <a:xfrm xmlns:a="http://schemas.openxmlformats.org/drawingml/2006/main">
+            <a:off x="1162050" y="2200275"/>
+            <a:ext cx="400050" cy="400050"/>
           </a:xfrm>
           <a:prstGeom xmlns:a="http://schemas.openxmlformats.org/drawingml/2006/main" prst="rect">
             <a:avLst/>
@@ -8326,9 +8328,9 @@
           <a:lstStyle xmlns:a="http://schemas.openxmlformats.org/drawingml/2006/main"/>
           <a:p xmlns:a="http://schemas.openxmlformats.org/drawingml/2006/main">
             <a:pPr algn="ctr">
-              <a:defRPr sz="1350" b="1">
-                <a:solidFill>
-                  <a:srgbClr val="FFFFFF"/>
+              <a:defRPr sz="1125" b="1">
+                <a:solidFill>
+                  <a:srgbClr val="2C6E73"/>
                 </a:solidFill>
                 <a:latin typeface="Arial"/>
                 <a:ea typeface="Arial"/>
@@ -8336,9 +8338,9 @@
               </a:defRPr>
             </a:pPr>
             <a:r>
-              <a:rPr sz="1350" b="1">
-                <a:solidFill>
-                  <a:srgbClr val="FFFFFF"/>
+              <a:rPr sz="1125" b="1">
+                <a:solidFill>
+                  <a:srgbClr val="2C6E73"/>
                 </a:solidFill>
                 <a:latin typeface="Arial"/>
                 <a:ea typeface="Arial"/>
@@ -8354,19 +8356,19 @@
           <p:cNvPr id="13" name="">
             <a:extLst xmlns:a="http://schemas.openxmlformats.org/drawingml/2006/main">
               <a:ext uri="{FF2B5EF4-FFF2-40B4-BE49-F238E27FC236}">
-                <a16:creationId xmlns:a16="http://schemas.microsoft.com/office/drawing/2014/main" id="{EE19F057-E494-4332-B663-02338049F0F7}"/>
-              </a:ext>
-            </a:extLst>
-          </p:cNvPr>
-          <p:cNvSpPr>
-            <a:spLocks xmlns:a="http://schemas.openxmlformats.org/drawingml/2006/main" noGrp="1"/>
-          </p:cNvSpPr>
-          <p:nvPr/>
-        </p:nvSpPr>
-        <p:spPr>
-          <a:xfrm xmlns:a="http://schemas.openxmlformats.org/drawingml/2006/main">
-            <a:off x="1714500" y="2181225"/>
-            <a:ext cx="9429750" cy="609600"/>
+                <a16:creationId xmlns:a16="http://schemas.microsoft.com/office/drawing/2014/main" id="{DB17DFC5-27DD-489E-B84B-3E5326303746}"/>
+              </a:ext>
+            </a:extLst>
+          </p:cNvPr>
+          <p:cNvSpPr>
+            <a:spLocks xmlns:a="http://schemas.openxmlformats.org/drawingml/2006/main" noGrp="1"/>
+          </p:cNvSpPr>
+          <p:nvPr/>
+        </p:nvSpPr>
+        <p:spPr>
+          <a:xfrm xmlns:a="http://schemas.openxmlformats.org/drawingml/2006/main">
+            <a:off x="1714500" y="2114550"/>
+            <a:ext cx="9525000" cy="809625"/>
           </a:xfrm>
           <a:prstGeom xmlns:a="http://schemas.openxmlformats.org/drawingml/2006/main" prst="rect">
             <a:avLst/>
@@ -8383,7 +8385,7 @@
           <a:lstStyle xmlns:a="http://schemas.openxmlformats.org/drawingml/2006/main"/>
           <a:p xmlns:a="http://schemas.openxmlformats.org/drawingml/2006/main">
             <a:pPr algn="l">
-              <a:defRPr sz="1500" b="0">
+              <a:defRPr sz="1725" b="0">
                 <a:solidFill>
                   <a:srgbClr val="17253A"/>
                 </a:solidFill>
@@ -8393,7 +8395,7 @@
               </a:defRPr>
             </a:pPr>
             <a:r>
-              <a:rPr sz="1500" b="0">
+              <a:rPr sz="1725" b="0">
                 <a:solidFill>
                   <a:srgbClr val="17253A"/>
                 </a:solidFill>
@@ -8401,7 +8403,7 @@
                 <a:ea typeface="Arial"/>
                 <a:cs typeface="Arial"/>
               </a:rPr>
-              <a:t>Identify the structure: Identify the number type and choose an efficient method.</a:t>
+              <a:t>34.750 + 8.906</a:t>
             </a:r>
           </a:p>
         </p:txBody>
@@ -8411,28 +8413,30 @@
           <p:cNvPr id="14" name="">
             <a:extLst xmlns:a="http://schemas.openxmlformats.org/drawingml/2006/main">
               <a:ext uri="{FF2B5EF4-FFF2-40B4-BE49-F238E27FC236}">
-                <a16:creationId xmlns:a16="http://schemas.microsoft.com/office/drawing/2014/main" id="{CBDD8A77-0F48-4E33-9E98-30A3A2264B44}"/>
-              </a:ext>
-            </a:extLst>
-          </p:cNvPr>
-          <p:cNvSpPr>
-            <a:spLocks xmlns:a="http://schemas.openxmlformats.org/drawingml/2006/main" noGrp="1"/>
-          </p:cNvSpPr>
-          <p:nvPr/>
-        </p:nvSpPr>
-        <p:spPr>
-          <a:xfrm xmlns:a="http://schemas.openxmlformats.org/drawingml/2006/main">
-            <a:off x="1000125" y="2990850"/>
-            <a:ext cx="476250" cy="476250"/>
-          </a:xfrm>
-          <a:prstGeom xmlns:a="http://schemas.openxmlformats.org/drawingml/2006/main" prst="ellipse">
+                <a16:creationId xmlns:a16="http://schemas.microsoft.com/office/drawing/2014/main" id="{E3DCC39C-27CA-45F8-A905-87FD25F39E55}"/>
+              </a:ext>
+            </a:extLst>
+          </p:cNvPr>
+          <p:cNvSpPr>
+            <a:spLocks xmlns:a="http://schemas.openxmlformats.org/drawingml/2006/main" noGrp="1"/>
+          </p:cNvSpPr>
+          <p:nvPr/>
+        </p:nvSpPr>
+        <p:spPr>
+          <a:xfrm xmlns:a="http://schemas.openxmlformats.org/drawingml/2006/main">
+            <a:off x="1714500" y="2943225"/>
+            <a:ext cx="9334500" cy="9525"/>
+          </a:xfrm>
+          <a:prstGeom xmlns:a="http://schemas.openxmlformats.org/drawingml/2006/main" prst="rect">
             <a:avLst/>
           </a:prstGeom>
           <a:solidFill xmlns:a="http://schemas.openxmlformats.org/drawingml/2006/main">
-            <a:srgbClr val="2C6E73"/>
+            <a:srgbClr val="D9E0E6"/>
           </a:solidFill>
           <a:ln xmlns:a="http://schemas.openxmlformats.org/drawingml/2006/main" w="0">
-            <a:noFill/>
+            <a:solidFill>
+              <a:srgbClr val="D9E0E6"/>
+            </a:solidFill>
           </a:ln>
         </p:spPr>
       </p:sp>
@@ -8441,19 +8445,19 @@
           <p:cNvPr id="15" name="">
             <a:extLst xmlns:a="http://schemas.openxmlformats.org/drawingml/2006/main">
               <a:ext uri="{FF2B5EF4-FFF2-40B4-BE49-F238E27FC236}">
-                <a16:creationId xmlns:a16="http://schemas.microsoft.com/office/drawing/2014/main" id="{ECF09AEF-B308-4537-A72B-8B3E7C7A68CE}"/>
-              </a:ext>
-            </a:extLst>
-          </p:cNvPr>
-          <p:cNvSpPr>
-            <a:spLocks xmlns:a="http://schemas.openxmlformats.org/drawingml/2006/main" noGrp="1"/>
-          </p:cNvSpPr>
-          <p:nvPr/>
-        </p:nvSpPr>
-        <p:spPr>
-          <a:xfrm xmlns:a="http://schemas.openxmlformats.org/drawingml/2006/main">
-            <a:off x="1000125" y="3019425"/>
-            <a:ext cx="476250" cy="419100"/>
+                <a16:creationId xmlns:a16="http://schemas.microsoft.com/office/drawing/2014/main" id="{4DC58699-F682-4702-A6F4-BF141EDBBAA5}"/>
+              </a:ext>
+            </a:extLst>
+          </p:cNvPr>
+          <p:cNvSpPr>
+            <a:spLocks xmlns:a="http://schemas.openxmlformats.org/drawingml/2006/main" noGrp="1"/>
+          </p:cNvSpPr>
+          <p:nvPr/>
+        </p:nvSpPr>
+        <p:spPr>
+          <a:xfrm xmlns:a="http://schemas.openxmlformats.org/drawingml/2006/main">
+            <a:off x="1162050" y="3076575"/>
+            <a:ext cx="400050" cy="400050"/>
           </a:xfrm>
           <a:prstGeom xmlns:a="http://schemas.openxmlformats.org/drawingml/2006/main" prst="rect">
             <a:avLst/>
@@ -8470,9 +8474,9 @@
           <a:lstStyle xmlns:a="http://schemas.openxmlformats.org/drawingml/2006/main"/>
           <a:p xmlns:a="http://schemas.openxmlformats.org/drawingml/2006/main">
             <a:pPr algn="ctr">
-              <a:defRPr sz="1350" b="1">
-                <a:solidFill>
-                  <a:srgbClr val="FFFFFF"/>
+              <a:defRPr sz="1125" b="1">
+                <a:solidFill>
+                  <a:srgbClr val="2C6E73"/>
                 </a:solidFill>
                 <a:latin typeface="Arial"/>
                 <a:ea typeface="Arial"/>
@@ -8480,9 +8484,9 @@
               </a:defRPr>
             </a:pPr>
             <a:r>
-              <a:rPr sz="1350" b="1">
-                <a:solidFill>
-                  <a:srgbClr val="FFFFFF"/>
+              <a:rPr sz="1125" b="1">
+                <a:solidFill>
+                  <a:srgbClr val="2C6E73"/>
                 </a:solidFill>
                 <a:latin typeface="Arial"/>
                 <a:ea typeface="Arial"/>
@@ -8498,19 +8502,19 @@
           <p:cNvPr id="16" name="">
             <a:extLst xmlns:a="http://schemas.openxmlformats.org/drawingml/2006/main">
               <a:ext uri="{FF2B5EF4-FFF2-40B4-BE49-F238E27FC236}">
-                <a16:creationId xmlns:a16="http://schemas.microsoft.com/office/drawing/2014/main" id="{B280C216-5B05-4772-AF8B-9F90BB8FE4B5}"/>
-              </a:ext>
-            </a:extLst>
-          </p:cNvPr>
-          <p:cNvSpPr>
-            <a:spLocks xmlns:a="http://schemas.openxmlformats.org/drawingml/2006/main" noGrp="1"/>
-          </p:cNvSpPr>
-          <p:nvPr/>
-        </p:nvSpPr>
-        <p:spPr>
-          <a:xfrm xmlns:a="http://schemas.openxmlformats.org/drawingml/2006/main">
-            <a:off x="1714500" y="2924175"/>
-            <a:ext cx="9429750" cy="609600"/>
+                <a16:creationId xmlns:a16="http://schemas.microsoft.com/office/drawing/2014/main" id="{EEFB76B8-6416-4A05-A4FB-7B513C87B414}"/>
+              </a:ext>
+            </a:extLst>
+          </p:cNvPr>
+          <p:cNvSpPr>
+            <a:spLocks xmlns:a="http://schemas.openxmlformats.org/drawingml/2006/main" noGrp="1"/>
+          </p:cNvSpPr>
+          <p:nvPr/>
+        </p:nvSpPr>
+        <p:spPr>
+          <a:xfrm xmlns:a="http://schemas.openxmlformats.org/drawingml/2006/main">
+            <a:off x="1714500" y="2990850"/>
+            <a:ext cx="9525000" cy="809625"/>
           </a:xfrm>
           <a:prstGeom xmlns:a="http://schemas.openxmlformats.org/drawingml/2006/main" prst="rect">
             <a:avLst/>
@@ -8527,7 +8531,7 @@
           <a:lstStyle xmlns:a="http://schemas.openxmlformats.org/drawingml/2006/main"/>
           <a:p xmlns:a="http://schemas.openxmlformats.org/drawingml/2006/main">
             <a:pPr algn="l">
-              <a:defRPr sz="1500" b="0">
+              <a:defRPr sz="1725" b="0">
                 <a:solidFill>
                   <a:srgbClr val="17253A"/>
                 </a:solidFill>
@@ -8537,7 +8541,7 @@
               </a:defRPr>
             </a:pPr>
             <a:r>
-              <a:rPr sz="1500" b="0">
+              <a:rPr sz="1725" b="0">
                 <a:solidFill>
                   <a:srgbClr val="17253A"/>
                 </a:solidFill>
@@ -8545,7 +8549,7 @@
                 <a:ea typeface="Arial"/>
                 <a:cs typeface="Arial"/>
               </a:rPr>
-              <a:t>Set up the method: Keep place values or denominators aligned and record each stage.</a:t>
+              <a:t>Align decimal points</a:t>
             </a:r>
           </a:p>
         </p:txBody>
@@ -8555,28 +8559,30 @@
           <p:cNvPr id="17" name="">
             <a:extLst xmlns:a="http://schemas.openxmlformats.org/drawingml/2006/main">
               <a:ext uri="{FF2B5EF4-FFF2-40B4-BE49-F238E27FC236}">
-                <a16:creationId xmlns:a16="http://schemas.microsoft.com/office/drawing/2014/main" id="{8666C385-037F-46E5-B0D1-77E196E0B549}"/>
-              </a:ext>
-            </a:extLst>
-          </p:cNvPr>
-          <p:cNvSpPr>
-            <a:spLocks xmlns:a="http://schemas.openxmlformats.org/drawingml/2006/main" noGrp="1"/>
-          </p:cNvSpPr>
-          <p:nvPr/>
-        </p:nvSpPr>
-        <p:spPr>
-          <a:xfrm xmlns:a="http://schemas.openxmlformats.org/drawingml/2006/main">
-            <a:off x="1000125" y="3733800"/>
-            <a:ext cx="476250" cy="476250"/>
-          </a:xfrm>
-          <a:prstGeom xmlns:a="http://schemas.openxmlformats.org/drawingml/2006/main" prst="ellipse">
+                <a16:creationId xmlns:a16="http://schemas.microsoft.com/office/drawing/2014/main" id="{505B2D8B-209A-433B-847A-DC66D5283449}"/>
+              </a:ext>
+            </a:extLst>
+          </p:cNvPr>
+          <p:cNvSpPr>
+            <a:spLocks xmlns:a="http://schemas.openxmlformats.org/drawingml/2006/main" noGrp="1"/>
+          </p:cNvSpPr>
+          <p:nvPr/>
+        </p:nvSpPr>
+        <p:spPr>
+          <a:xfrm xmlns:a="http://schemas.openxmlformats.org/drawingml/2006/main">
+            <a:off x="1714500" y="3819525"/>
+            <a:ext cx="9334500" cy="9525"/>
+          </a:xfrm>
+          <a:prstGeom xmlns:a="http://schemas.openxmlformats.org/drawingml/2006/main" prst="rect">
             <a:avLst/>
           </a:prstGeom>
           <a:solidFill xmlns:a="http://schemas.openxmlformats.org/drawingml/2006/main">
-            <a:srgbClr val="2C6E73"/>
+            <a:srgbClr val="D9E0E6"/>
           </a:solidFill>
           <a:ln xmlns:a="http://schemas.openxmlformats.org/drawingml/2006/main" w="0">
-            <a:noFill/>
+            <a:solidFill>
+              <a:srgbClr val="D9E0E6"/>
+            </a:solidFill>
           </a:ln>
         </p:spPr>
       </p:sp>
@@ -8585,19 +8591,19 @@
           <p:cNvPr id="18" name="">
             <a:extLst xmlns:a="http://schemas.openxmlformats.org/drawingml/2006/main">
               <a:ext uri="{FF2B5EF4-FFF2-40B4-BE49-F238E27FC236}">
-                <a16:creationId xmlns:a16="http://schemas.microsoft.com/office/drawing/2014/main" id="{272F3C43-22E0-4239-BD4C-C5CB23D1CADF}"/>
-              </a:ext>
-            </a:extLst>
-          </p:cNvPr>
-          <p:cNvSpPr>
-            <a:spLocks xmlns:a="http://schemas.openxmlformats.org/drawingml/2006/main" noGrp="1"/>
-          </p:cNvSpPr>
-          <p:nvPr/>
-        </p:nvSpPr>
-        <p:spPr>
-          <a:xfrm xmlns:a="http://schemas.openxmlformats.org/drawingml/2006/main">
-            <a:off x="1000125" y="3762375"/>
-            <a:ext cx="476250" cy="419100"/>
+                <a16:creationId xmlns:a16="http://schemas.microsoft.com/office/drawing/2014/main" id="{B2A5D3F3-66D5-4BA1-A57B-17D258F8A6DD}"/>
+              </a:ext>
+            </a:extLst>
+          </p:cNvPr>
+          <p:cNvSpPr>
+            <a:spLocks xmlns:a="http://schemas.openxmlformats.org/drawingml/2006/main" noGrp="1"/>
+          </p:cNvSpPr>
+          <p:nvPr/>
+        </p:nvSpPr>
+        <p:spPr>
+          <a:xfrm xmlns:a="http://schemas.openxmlformats.org/drawingml/2006/main">
+            <a:off x="1162050" y="3952875"/>
+            <a:ext cx="400050" cy="400050"/>
           </a:xfrm>
           <a:prstGeom xmlns:a="http://schemas.openxmlformats.org/drawingml/2006/main" prst="rect">
             <a:avLst/>
@@ -8614,9 +8620,9 @@
           <a:lstStyle xmlns:a="http://schemas.openxmlformats.org/drawingml/2006/main"/>
           <a:p xmlns:a="http://schemas.openxmlformats.org/drawingml/2006/main">
             <a:pPr algn="ctr">
-              <a:defRPr sz="1350" b="1">
-                <a:solidFill>
-                  <a:srgbClr val="FFFFFF"/>
+              <a:defRPr sz="1125" b="1">
+                <a:solidFill>
+                  <a:srgbClr val="2C6E73"/>
                 </a:solidFill>
                 <a:latin typeface="Arial"/>
                 <a:ea typeface="Arial"/>
@@ -8624,9 +8630,9 @@
               </a:defRPr>
             </a:pPr>
             <a:r>
-              <a:rPr sz="1350" b="1">
-                <a:solidFill>
-                  <a:srgbClr val="FFFFFF"/>
+              <a:rPr sz="1125" b="1">
+                <a:solidFill>
+                  <a:srgbClr val="2C6E73"/>
                 </a:solidFill>
                 <a:latin typeface="Arial"/>
                 <a:ea typeface="Arial"/>
@@ -8642,19 +8648,19 @@
           <p:cNvPr id="19" name="">
             <a:extLst xmlns:a="http://schemas.openxmlformats.org/drawingml/2006/main">
               <a:ext uri="{FF2B5EF4-FFF2-40B4-BE49-F238E27FC236}">
-                <a16:creationId xmlns:a16="http://schemas.microsoft.com/office/drawing/2014/main" id="{956F7A6E-8F18-430F-8168-562D2389BE2F}"/>
-              </a:ext>
-            </a:extLst>
-          </p:cNvPr>
-          <p:cNvSpPr>
-            <a:spLocks xmlns:a="http://schemas.openxmlformats.org/drawingml/2006/main" noGrp="1"/>
-          </p:cNvSpPr>
-          <p:nvPr/>
-        </p:nvSpPr>
-        <p:spPr>
-          <a:xfrm xmlns:a="http://schemas.openxmlformats.org/drawingml/2006/main">
-            <a:off x="1714500" y="3667125"/>
-            <a:ext cx="9429750" cy="609600"/>
+                <a16:creationId xmlns:a16="http://schemas.microsoft.com/office/drawing/2014/main" id="{2AEAC433-627E-4CA3-8F83-D8AB574BDCD6}"/>
+              </a:ext>
+            </a:extLst>
+          </p:cNvPr>
+          <p:cNvSpPr>
+            <a:spLocks xmlns:a="http://schemas.openxmlformats.org/drawingml/2006/main" noGrp="1"/>
+          </p:cNvSpPr>
+          <p:nvPr/>
+        </p:nvSpPr>
+        <p:spPr>
+          <a:xfrm xmlns:a="http://schemas.openxmlformats.org/drawingml/2006/main">
+            <a:off x="1714500" y="3867150"/>
+            <a:ext cx="9525000" cy="809625"/>
           </a:xfrm>
           <a:prstGeom xmlns:a="http://schemas.openxmlformats.org/drawingml/2006/main" prst="rect">
             <a:avLst/>
@@ -8671,7 +8677,7 @@
           <a:lstStyle xmlns:a="http://schemas.openxmlformats.org/drawingml/2006/main"/>
           <a:p xmlns:a="http://schemas.openxmlformats.org/drawingml/2006/main">
             <a:pPr algn="l">
-              <a:defRPr sz="1500" b="0">
+              <a:defRPr sz="1725" b="0">
                 <a:solidFill>
                   <a:srgbClr val="17253A"/>
                 </a:solidFill>
@@ -8681,7 +8687,7 @@
               </a:defRPr>
             </a:pPr>
             <a:r>
-              <a:rPr sz="1500" b="0">
+              <a:rPr sz="1725" b="0">
                 <a:solidFill>
                   <a:srgbClr val="17253A"/>
                 </a:solidFill>
@@ -8689,7 +8695,7 @@
                 <a:ea typeface="Arial"/>
                 <a:cs typeface="Arial"/>
               </a:rPr>
-              <a:t>Complete the calculation: 43.656.</a:t>
+              <a:t>34.750 + 8.906</a:t>
             </a:r>
           </a:p>
         </p:txBody>
@@ -8699,28 +8705,30 @@
           <p:cNvPr id="20" name="">
             <a:extLst xmlns:a="http://schemas.openxmlformats.org/drawingml/2006/main">
               <a:ext uri="{FF2B5EF4-FFF2-40B4-BE49-F238E27FC236}">
-                <a16:creationId xmlns:a16="http://schemas.microsoft.com/office/drawing/2014/main" id="{19D91C9F-3D04-4A9C-92A7-AE400D42714B}"/>
-              </a:ext>
-            </a:extLst>
-          </p:cNvPr>
-          <p:cNvSpPr>
-            <a:spLocks xmlns:a="http://schemas.openxmlformats.org/drawingml/2006/main" noGrp="1"/>
-          </p:cNvSpPr>
-          <p:nvPr/>
-        </p:nvSpPr>
-        <p:spPr>
-          <a:xfrm xmlns:a="http://schemas.openxmlformats.org/drawingml/2006/main">
-            <a:off x="1000125" y="4476750"/>
-            <a:ext cx="476250" cy="476250"/>
-          </a:xfrm>
-          <a:prstGeom xmlns:a="http://schemas.openxmlformats.org/drawingml/2006/main" prst="ellipse">
+                <a16:creationId xmlns:a16="http://schemas.microsoft.com/office/drawing/2014/main" id="{33478C01-2C62-4093-A540-9DCD06014ACB}"/>
+              </a:ext>
+            </a:extLst>
+          </p:cNvPr>
+          <p:cNvSpPr>
+            <a:spLocks xmlns:a="http://schemas.openxmlformats.org/drawingml/2006/main" noGrp="1"/>
+          </p:cNvSpPr>
+          <p:nvPr/>
+        </p:nvSpPr>
+        <p:spPr>
+          <a:xfrm xmlns:a="http://schemas.openxmlformats.org/drawingml/2006/main">
+            <a:off x="1714500" y="4695825"/>
+            <a:ext cx="9334500" cy="9525"/>
+          </a:xfrm>
+          <a:prstGeom xmlns:a="http://schemas.openxmlformats.org/drawingml/2006/main" prst="rect">
             <a:avLst/>
           </a:prstGeom>
           <a:solidFill xmlns:a="http://schemas.openxmlformats.org/drawingml/2006/main">
-            <a:srgbClr val="2C6E73"/>
+            <a:srgbClr val="D9E0E6"/>
           </a:solidFill>
           <a:ln xmlns:a="http://schemas.openxmlformats.org/drawingml/2006/main" w="0">
-            <a:noFill/>
+            <a:solidFill>
+              <a:srgbClr val="D9E0E6"/>
+            </a:solidFill>
           </a:ln>
         </p:spPr>
       </p:sp>
@@ -8729,19 +8737,19 @@
           <p:cNvPr id="21" name="">
             <a:extLst xmlns:a="http://schemas.openxmlformats.org/drawingml/2006/main">
               <a:ext uri="{FF2B5EF4-FFF2-40B4-BE49-F238E27FC236}">
-                <a16:creationId xmlns:a16="http://schemas.microsoft.com/office/drawing/2014/main" id="{036EA4D9-5B5B-46E5-9FBB-70593F02D207}"/>
-              </a:ext>
-            </a:extLst>
-          </p:cNvPr>
-          <p:cNvSpPr>
-            <a:spLocks xmlns:a="http://schemas.openxmlformats.org/drawingml/2006/main" noGrp="1"/>
-          </p:cNvSpPr>
-          <p:nvPr/>
-        </p:nvSpPr>
-        <p:spPr>
-          <a:xfrm xmlns:a="http://schemas.openxmlformats.org/drawingml/2006/main">
-            <a:off x="1000125" y="4505325"/>
-            <a:ext cx="476250" cy="419100"/>
+                <a16:creationId xmlns:a16="http://schemas.microsoft.com/office/drawing/2014/main" id="{916AF206-8100-4853-AC23-F3C6D38EF8DA}"/>
+              </a:ext>
+            </a:extLst>
+          </p:cNvPr>
+          <p:cNvSpPr>
+            <a:spLocks xmlns:a="http://schemas.openxmlformats.org/drawingml/2006/main" noGrp="1"/>
+          </p:cNvSpPr>
+          <p:nvPr/>
+        </p:nvSpPr>
+        <p:spPr>
+          <a:xfrm xmlns:a="http://schemas.openxmlformats.org/drawingml/2006/main">
+            <a:off x="1162050" y="4829175"/>
+            <a:ext cx="400050" cy="400050"/>
           </a:xfrm>
           <a:prstGeom xmlns:a="http://schemas.openxmlformats.org/drawingml/2006/main" prst="rect">
             <a:avLst/>
@@ -8758,9 +8766,9 @@
           <a:lstStyle xmlns:a="http://schemas.openxmlformats.org/drawingml/2006/main"/>
           <a:p xmlns:a="http://schemas.openxmlformats.org/drawingml/2006/main">
             <a:pPr algn="ctr">
-              <a:defRPr sz="1350" b="1">
-                <a:solidFill>
-                  <a:srgbClr val="FFFFFF"/>
+              <a:defRPr sz="1125" b="1">
+                <a:solidFill>
+                  <a:srgbClr val="2F785D"/>
                 </a:solidFill>
                 <a:latin typeface="Arial"/>
                 <a:ea typeface="Arial"/>
@@ -8768,9 +8776,9 @@
               </a:defRPr>
             </a:pPr>
             <a:r>
-              <a:rPr sz="1350" b="1">
-                <a:solidFill>
-                  <a:srgbClr val="FFFFFF"/>
+              <a:rPr sz="1125" b="1">
+                <a:solidFill>
+                  <a:srgbClr val="2F785D"/>
                 </a:solidFill>
                 <a:latin typeface="Arial"/>
                 <a:ea typeface="Arial"/>
@@ -8786,19 +8794,19 @@
           <p:cNvPr id="22" name="">
             <a:extLst xmlns:a="http://schemas.openxmlformats.org/drawingml/2006/main">
               <a:ext uri="{FF2B5EF4-FFF2-40B4-BE49-F238E27FC236}">
-                <a16:creationId xmlns:a16="http://schemas.microsoft.com/office/drawing/2014/main" id="{A131884A-CAB4-428C-80E7-D616C355F9E2}"/>
-              </a:ext>
-            </a:extLst>
-          </p:cNvPr>
-          <p:cNvSpPr>
-            <a:spLocks xmlns:a="http://schemas.openxmlformats.org/drawingml/2006/main" noGrp="1"/>
-          </p:cNvSpPr>
-          <p:nvPr/>
-        </p:nvSpPr>
-        <p:spPr>
-          <a:xfrm xmlns:a="http://schemas.openxmlformats.org/drawingml/2006/main">
-            <a:off x="1714500" y="4410075"/>
-            <a:ext cx="9429750" cy="609600"/>
+                <a16:creationId xmlns:a16="http://schemas.microsoft.com/office/drawing/2014/main" id="{EDAFC908-513D-4733-B092-716E4D697595}"/>
+              </a:ext>
+            </a:extLst>
+          </p:cNvPr>
+          <p:cNvSpPr>
+            <a:spLocks xmlns:a="http://schemas.openxmlformats.org/drawingml/2006/main" noGrp="1"/>
+          </p:cNvSpPr>
+          <p:nvPr/>
+        </p:nvSpPr>
+        <p:spPr>
+          <a:xfrm xmlns:a="http://schemas.openxmlformats.org/drawingml/2006/main">
+            <a:off x="1714500" y="4743450"/>
+            <a:ext cx="9525000" cy="809625"/>
           </a:xfrm>
           <a:prstGeom xmlns:a="http://schemas.openxmlformats.org/drawingml/2006/main" prst="rect">
             <a:avLst/>
@@ -8815,7 +8823,7 @@
           <a:lstStyle xmlns:a="http://schemas.openxmlformats.org/drawingml/2006/main"/>
           <a:p xmlns:a="http://schemas.openxmlformats.org/drawingml/2006/main">
             <a:pPr algn="l">
-              <a:defRPr sz="1500" b="1">
+              <a:defRPr sz="1725" b="1">
                 <a:solidFill>
                   <a:srgbClr val="2F785D"/>
                 </a:solidFill>
@@ -8825,7 +8833,7 @@
               </a:defRPr>
             </a:pPr>
             <a:r>
-              <a:rPr sz="1500" b="1">
+              <a:rPr sz="1725" b="1">
                 <a:solidFill>
                   <a:srgbClr val="2F785D"/>
                 </a:solidFill>
@@ -8833,7 +8841,7 @@
                 <a:ea typeface="Arial"/>
                 <a:cs typeface="Arial"/>
               </a:rPr>
-              <a:t>Check the result: Simplify where needed and check the result for size and reasonableness.</a:t>
+              <a:t>43.656</a:t>
             </a:r>
           </a:p>
         </p:txBody>
@@ -8841,7 +8849,7 @@
     </p:spTree>
     <p:extLst>
       <p:ext uri="{BB962C8B-B14F-4D97-AF65-F5344CB8AC3E}">
-        <p14:creationId xmlns:p14="http://schemas.microsoft.com/office/powerpoint/2010/main" val="1091312200"/>
+        <p14:creationId xmlns:p14="http://schemas.microsoft.com/office/powerpoint/2010/main" val="1944951258"/>
       </p:ext>
     </p:extLst>
   </p:cSld>
@@ -9134,7 +9142,7 @@
           <p:cNvPr id="15" name="">
             <a:extLst xmlns:a="http://schemas.openxmlformats.org/drawingml/2006/main">
               <a:ext uri="{FF2B5EF4-FFF2-40B4-BE49-F238E27FC236}">
-                <a16:creationId xmlns:a16="http://schemas.microsoft.com/office/drawing/2014/main" id="{BC291E3B-FB8A-4173-985F-304F2BC55198}"/>
+                <a16:creationId xmlns:a16="http://schemas.microsoft.com/office/drawing/2014/main" id="{173BFF14-3C3D-4BB5-BA4C-9611C1567555}"/>
               </a:ext>
             </a:extLst>
           </p:cNvPr>
@@ -9166,7 +9174,7 @@
           <p:cNvPr id="2" name="">
             <a:extLst xmlns:a="http://schemas.openxmlformats.org/drawingml/2006/main">
               <a:ext uri="{FF2B5EF4-FFF2-40B4-BE49-F238E27FC236}">
-                <a16:creationId xmlns:a16="http://schemas.microsoft.com/office/drawing/2014/main" id="{EB52F1FA-078E-4955-90B5-ADF15E876357}"/>
+                <a16:creationId xmlns:a16="http://schemas.microsoft.com/office/drawing/2014/main" id="{8A3EE3D7-0F0F-4293-A127-04BBB4FFB2CD}"/>
               </a:ext>
             </a:extLst>
           </p:cNvPr>
@@ -9223,7 +9231,7 @@
           <p:cNvPr id="3" name="">
             <a:extLst xmlns:a="http://schemas.openxmlformats.org/drawingml/2006/main">
               <a:ext uri="{FF2B5EF4-FFF2-40B4-BE49-F238E27FC236}">
-                <a16:creationId xmlns:a16="http://schemas.microsoft.com/office/drawing/2014/main" id="{9B34D068-0188-46BF-A7A9-6814A94AEE9A}"/>
+                <a16:creationId xmlns:a16="http://schemas.microsoft.com/office/drawing/2014/main" id="{57588F2F-6B9D-4202-B6B4-96A802E265DA}"/>
               </a:ext>
             </a:extLst>
           </p:cNvPr>
@@ -9255,7 +9263,7 @@
           <p:cNvPr id="4" name="">
             <a:extLst xmlns:a="http://schemas.openxmlformats.org/drawingml/2006/main">
               <a:ext uri="{FF2B5EF4-FFF2-40B4-BE49-F238E27FC236}">
-                <a16:creationId xmlns:a16="http://schemas.microsoft.com/office/drawing/2014/main" id="{D27CB858-0791-4904-B50D-8BCF3F74E7FF}"/>
+                <a16:creationId xmlns:a16="http://schemas.microsoft.com/office/drawing/2014/main" id="{7BBB0EF0-5055-4FC0-826C-C7AEDE2FAFF2}"/>
               </a:ext>
             </a:extLst>
           </p:cNvPr>
@@ -9312,7 +9320,7 @@
           <p:cNvPr id="5" name="">
             <a:extLst xmlns:a="http://schemas.openxmlformats.org/drawingml/2006/main">
               <a:ext uri="{FF2B5EF4-FFF2-40B4-BE49-F238E27FC236}">
-                <a16:creationId xmlns:a16="http://schemas.microsoft.com/office/drawing/2014/main" id="{CF138BC2-F284-453F-9261-08D55C454CDA}"/>
+                <a16:creationId xmlns:a16="http://schemas.microsoft.com/office/drawing/2014/main" id="{BE7037E7-ED3F-419C-B2C7-A74DFD43B677}"/>
               </a:ext>
             </a:extLst>
           </p:cNvPr>
@@ -9369,7 +9377,7 @@
           <p:cNvPr id="6" name="">
             <a:extLst xmlns:a="http://schemas.openxmlformats.org/drawingml/2006/main">
               <a:ext uri="{FF2B5EF4-FFF2-40B4-BE49-F238E27FC236}">
-                <a16:creationId xmlns:a16="http://schemas.microsoft.com/office/drawing/2014/main" id="{AB61C996-5AB7-48DA-9848-4BD4F7B9D2C8}"/>
+                <a16:creationId xmlns:a16="http://schemas.microsoft.com/office/drawing/2014/main" id="{7DE6EB96-02C3-4F1D-ACAB-F90FF492A4A7}"/>
               </a:ext>
             </a:extLst>
           </p:cNvPr>
@@ -9426,7 +9434,7 @@
           <p:cNvPr id="7" name="">
             <a:extLst xmlns:a="http://schemas.openxmlformats.org/drawingml/2006/main">
               <a:ext uri="{FF2B5EF4-FFF2-40B4-BE49-F238E27FC236}">
-                <a16:creationId xmlns:a16="http://schemas.microsoft.com/office/drawing/2014/main" id="{BF59BA3E-6296-463E-9E62-F052D3EFD706}"/>
+                <a16:creationId xmlns:a16="http://schemas.microsoft.com/office/drawing/2014/main" id="{79C0BA9F-1514-4816-B254-C9182E575F48}"/>
               </a:ext>
             </a:extLst>
           </p:cNvPr>
@@ -9458,7 +9466,7 @@
           <p:cNvPr id="8" name="">
             <a:extLst xmlns:a="http://schemas.openxmlformats.org/drawingml/2006/main">
               <a:ext uri="{FF2B5EF4-FFF2-40B4-BE49-F238E27FC236}">
-                <a16:creationId xmlns:a16="http://schemas.microsoft.com/office/drawing/2014/main" id="{E6CD8F31-C823-400F-8320-EE82FD015A0C}"/>
+                <a16:creationId xmlns:a16="http://schemas.microsoft.com/office/drawing/2014/main" id="{BD871A38-2049-4578-8FBC-8A96E87BC0EC}"/>
               </a:ext>
             </a:extLst>
           </p:cNvPr>
@@ -9515,7 +9523,7 @@
           <p:cNvPr id="9" name="">
             <a:extLst xmlns:a="http://schemas.openxmlformats.org/drawingml/2006/main">
               <a:ext uri="{FF2B5EF4-FFF2-40B4-BE49-F238E27FC236}">
-                <a16:creationId xmlns:a16="http://schemas.microsoft.com/office/drawing/2014/main" id="{048B8106-586A-4102-B73A-023EFD89D445}"/>
+                <a16:creationId xmlns:a16="http://schemas.microsoft.com/office/drawing/2014/main" id="{3CA29318-E2B9-4303-856B-B92210F38CEA}"/>
               </a:ext>
             </a:extLst>
           </p:cNvPr>
@@ -9572,7 +9580,7 @@
           <p:cNvPr id="10" name="">
             <a:extLst xmlns:a="http://schemas.openxmlformats.org/drawingml/2006/main">
               <a:ext uri="{FF2B5EF4-FFF2-40B4-BE49-F238E27FC236}">
-                <a16:creationId xmlns:a16="http://schemas.microsoft.com/office/drawing/2014/main" id="{E821A66C-567D-4F63-8809-CAB4209B909E}"/>
+                <a16:creationId xmlns:a16="http://schemas.microsoft.com/office/drawing/2014/main" id="{31DA4984-FD98-4090-87F5-3563C65687DB}"/>
               </a:ext>
             </a:extLst>
           </p:cNvPr>
@@ -9629,7 +9637,7 @@
           <p:cNvPr id="11" name="">
             <a:extLst xmlns:a="http://schemas.openxmlformats.org/drawingml/2006/main">
               <a:ext uri="{FF2B5EF4-FFF2-40B4-BE49-F238E27FC236}">
-                <a16:creationId xmlns:a16="http://schemas.microsoft.com/office/drawing/2014/main" id="{4DB669D9-A56D-42F2-97D4-43A6248FCF8B}"/>
+                <a16:creationId xmlns:a16="http://schemas.microsoft.com/office/drawing/2014/main" id="{D4EC8227-D0AB-4215-B4D2-C7B29543D22D}"/>
               </a:ext>
             </a:extLst>
           </p:cNvPr>
@@ -9686,7 +9694,7 @@
           <p:cNvPr id="12" name="">
             <a:extLst xmlns:a="http://schemas.openxmlformats.org/drawingml/2006/main">
               <a:ext uri="{FF2B5EF4-FFF2-40B4-BE49-F238E27FC236}">
-                <a16:creationId xmlns:a16="http://schemas.microsoft.com/office/drawing/2014/main" id="{34603C93-2A4B-498F-A00B-16138B348D06}"/>
+                <a16:creationId xmlns:a16="http://schemas.microsoft.com/office/drawing/2014/main" id="{9DD62A62-EB66-4279-9B96-7C5CC0D766D7}"/>
               </a:ext>
             </a:extLst>
           </p:cNvPr>
@@ -9718,7 +9726,7 @@
           <p:cNvPr id="13" name="">
             <a:extLst xmlns:a="http://schemas.openxmlformats.org/drawingml/2006/main">
               <a:ext uri="{FF2B5EF4-FFF2-40B4-BE49-F238E27FC236}">
-                <a16:creationId xmlns:a16="http://schemas.microsoft.com/office/drawing/2014/main" id="{6DFF688E-432E-4595-AB8B-B97FDCC35363}"/>
+                <a16:creationId xmlns:a16="http://schemas.microsoft.com/office/drawing/2014/main" id="{5B7EDE7A-2B57-4A45-9F6D-2F41BD8D9FFA}"/>
               </a:ext>
             </a:extLst>
           </p:cNvPr>
@@ -9775,7 +9783,7 @@
           <p:cNvPr id="14" name="">
             <a:extLst xmlns:a="http://schemas.openxmlformats.org/drawingml/2006/main">
               <a:ext uri="{FF2B5EF4-FFF2-40B4-BE49-F238E27FC236}">
-                <a16:creationId xmlns:a16="http://schemas.microsoft.com/office/drawing/2014/main" id="{2DFDC9F7-7812-47B9-9EB8-E94C8775E3F6}"/>
+                <a16:creationId xmlns:a16="http://schemas.microsoft.com/office/drawing/2014/main" id="{A2C8C9C6-7453-408C-9D89-7C4790672E8C}"/>
               </a:ext>
             </a:extLst>
           </p:cNvPr>
@@ -9830,7 +9838,7 @@
     </p:spTree>
     <p:extLst>
       <p:ext uri="{BB962C8B-B14F-4D97-AF65-F5344CB8AC3E}">
-        <p14:creationId xmlns:p14="http://schemas.microsoft.com/office/powerpoint/2010/main" val="2032818766"/>
+        <p14:creationId xmlns:p14="http://schemas.microsoft.com/office/powerpoint/2010/main" val="874552142"/>
       </p:ext>
     </p:extLst>
   </p:cSld>
@@ -10031,7 +10039,7 @@
           <p:cNvPr id="16" name="">
             <a:extLst xmlns:a="http://schemas.openxmlformats.org/drawingml/2006/main">
               <a:ext uri="{FF2B5EF4-FFF2-40B4-BE49-F238E27FC236}">
-                <a16:creationId xmlns:a16="http://schemas.microsoft.com/office/drawing/2014/main" id="{FF69DA49-378C-481D-8083-B73B404489D2}"/>
+                <a16:creationId xmlns:a16="http://schemas.microsoft.com/office/drawing/2014/main" id="{4C0C67C5-E8DF-4FE2-8B16-9EEC24C30E00}"/>
               </a:ext>
             </a:extLst>
           </p:cNvPr>
@@ -10063,7 +10071,7 @@
           <p:cNvPr id="2" name="">
             <a:extLst xmlns:a="http://schemas.openxmlformats.org/drawingml/2006/main">
               <a:ext uri="{FF2B5EF4-FFF2-40B4-BE49-F238E27FC236}">
-                <a16:creationId xmlns:a16="http://schemas.microsoft.com/office/drawing/2014/main" id="{3ABBC2E9-F619-42CE-B820-DAC57953818C}"/>
+                <a16:creationId xmlns:a16="http://schemas.microsoft.com/office/drawing/2014/main" id="{78BA1719-A7BF-4B88-B7F6-D45EC8532A78}"/>
               </a:ext>
             </a:extLst>
           </p:cNvPr>
@@ -10120,7 +10128,7 @@
           <p:cNvPr id="3" name="">
             <a:extLst xmlns:a="http://schemas.openxmlformats.org/drawingml/2006/main">
               <a:ext uri="{FF2B5EF4-FFF2-40B4-BE49-F238E27FC236}">
-                <a16:creationId xmlns:a16="http://schemas.microsoft.com/office/drawing/2014/main" id="{43B28927-C6E3-498A-A2AD-014D214B6954}"/>
+                <a16:creationId xmlns:a16="http://schemas.microsoft.com/office/drawing/2014/main" id="{BA128D82-2462-4EFC-8EC2-0D7F6B8212E2}"/>
               </a:ext>
             </a:extLst>
           </p:cNvPr>
@@ -10152,7 +10160,7 @@
           <p:cNvPr id="4" name="">
             <a:extLst xmlns:a="http://schemas.openxmlformats.org/drawingml/2006/main">
               <a:ext uri="{FF2B5EF4-FFF2-40B4-BE49-F238E27FC236}">
-                <a16:creationId xmlns:a16="http://schemas.microsoft.com/office/drawing/2014/main" id="{2818DF6A-9FC9-44F9-A27E-DAE41EEA0FB4}"/>
+                <a16:creationId xmlns:a16="http://schemas.microsoft.com/office/drawing/2014/main" id="{66CC1DFC-559C-4FC9-93BA-3818013AC70B}"/>
               </a:ext>
             </a:extLst>
           </p:cNvPr>
@@ -10209,7 +10217,7 @@
           <p:cNvPr id="5" name="">
             <a:extLst xmlns:a="http://schemas.openxmlformats.org/drawingml/2006/main">
               <a:ext uri="{FF2B5EF4-FFF2-40B4-BE49-F238E27FC236}">
-                <a16:creationId xmlns:a16="http://schemas.microsoft.com/office/drawing/2014/main" id="{40C04E3E-F503-40FF-8F10-7C9C96874F3A}"/>
+                <a16:creationId xmlns:a16="http://schemas.microsoft.com/office/drawing/2014/main" id="{209C2869-E4F0-4378-99E2-30A2716E69FB}"/>
               </a:ext>
             </a:extLst>
           </p:cNvPr>
@@ -10266,7 +10274,7 @@
           <p:cNvPr id="6" name="">
             <a:extLst xmlns:a="http://schemas.openxmlformats.org/drawingml/2006/main">
               <a:ext uri="{FF2B5EF4-FFF2-40B4-BE49-F238E27FC236}">
-                <a16:creationId xmlns:a16="http://schemas.microsoft.com/office/drawing/2014/main" id="{0D679376-F50A-466E-A3C8-2AE5313134BC}"/>
+                <a16:creationId xmlns:a16="http://schemas.microsoft.com/office/drawing/2014/main" id="{874E29A0-EF78-4FAB-95B1-DE2EE82705F3}"/>
               </a:ext>
             </a:extLst>
           </p:cNvPr>
@@ -10323,7 +10331,7 @@
           <p:cNvPr id="7" name="">
             <a:extLst xmlns:a="http://schemas.openxmlformats.org/drawingml/2006/main">
               <a:ext uri="{FF2B5EF4-FFF2-40B4-BE49-F238E27FC236}">
-                <a16:creationId xmlns:a16="http://schemas.microsoft.com/office/drawing/2014/main" id="{57835D41-87F2-4298-AF58-1399F26F7ED3}"/>
+                <a16:creationId xmlns:a16="http://schemas.microsoft.com/office/drawing/2014/main" id="{063059BC-EE17-4664-B29D-FDC49CF74945}"/>
               </a:ext>
             </a:extLst>
           </p:cNvPr>
@@ -10355,7 +10363,7 @@
           <p:cNvPr id="8" name="">
             <a:extLst xmlns:a="http://schemas.openxmlformats.org/drawingml/2006/main">
               <a:ext uri="{FF2B5EF4-FFF2-40B4-BE49-F238E27FC236}">
-                <a16:creationId xmlns:a16="http://schemas.microsoft.com/office/drawing/2014/main" id="{85D41D19-D1DA-4E6D-B0A3-F49D22CB5D2B}"/>
+                <a16:creationId xmlns:a16="http://schemas.microsoft.com/office/drawing/2014/main" id="{9BF2CD24-608C-4F5A-91DD-E96061B9DDE1}"/>
               </a:ext>
             </a:extLst>
           </p:cNvPr>
@@ -10412,7 +10420,7 @@
           <p:cNvPr id="9" name="">
             <a:extLst xmlns:a="http://schemas.openxmlformats.org/drawingml/2006/main">
               <a:ext uri="{FF2B5EF4-FFF2-40B4-BE49-F238E27FC236}">
-                <a16:creationId xmlns:a16="http://schemas.microsoft.com/office/drawing/2014/main" id="{F1567525-C562-46C1-8581-D042D521FF22}"/>
+                <a16:creationId xmlns:a16="http://schemas.microsoft.com/office/drawing/2014/main" id="{287F7D07-E0D2-43E2-A38A-B57556A04DE9}"/>
               </a:ext>
             </a:extLst>
           </p:cNvPr>
@@ -10469,7 +10477,7 @@
           <p:cNvPr id="10" name="">
             <a:extLst xmlns:a="http://schemas.openxmlformats.org/drawingml/2006/main">
               <a:ext uri="{FF2B5EF4-FFF2-40B4-BE49-F238E27FC236}">
-                <a16:creationId xmlns:a16="http://schemas.microsoft.com/office/drawing/2014/main" id="{CA40B3DD-FDF0-46A3-B976-CE43C566573C}"/>
+                <a16:creationId xmlns:a16="http://schemas.microsoft.com/office/drawing/2014/main" id="{79440035-1F34-4D20-8D81-B1B8A1E19611}"/>
               </a:ext>
             </a:extLst>
           </p:cNvPr>
@@ -10526,7 +10534,7 @@
           <p:cNvPr id="11" name="">
             <a:extLst xmlns:a="http://schemas.openxmlformats.org/drawingml/2006/main">
               <a:ext uri="{FF2B5EF4-FFF2-40B4-BE49-F238E27FC236}">
-                <a16:creationId xmlns:a16="http://schemas.microsoft.com/office/drawing/2014/main" id="{53C2F213-606E-4F18-A6E3-057909BE8DE6}"/>
+                <a16:creationId xmlns:a16="http://schemas.microsoft.com/office/drawing/2014/main" id="{4743D02B-AF6C-4678-AAFC-17256222C139}"/>
               </a:ext>
             </a:extLst>
           </p:cNvPr>
@@ -10583,7 +10591,7 @@
           <p:cNvPr id="12" name="">
             <a:extLst xmlns:a="http://schemas.openxmlformats.org/drawingml/2006/main">
               <a:ext uri="{FF2B5EF4-FFF2-40B4-BE49-F238E27FC236}">
-                <a16:creationId xmlns:a16="http://schemas.microsoft.com/office/drawing/2014/main" id="{CA6E45E7-EA05-48C0-A997-3FF504F710C1}"/>
+                <a16:creationId xmlns:a16="http://schemas.microsoft.com/office/drawing/2014/main" id="{0B7A4816-D72A-4BBD-A0EC-FAED5BD3C0AB}"/>
               </a:ext>
             </a:extLst>
           </p:cNvPr>
@@ -10640,7 +10648,7 @@
           <p:cNvPr id="13" name="">
             <a:extLst xmlns:a="http://schemas.openxmlformats.org/drawingml/2006/main">
               <a:ext uri="{FF2B5EF4-FFF2-40B4-BE49-F238E27FC236}">
-                <a16:creationId xmlns:a16="http://schemas.microsoft.com/office/drawing/2014/main" id="{6B3D6A2E-AAAB-44EE-82FE-EF225D8F7F73}"/>
+                <a16:creationId xmlns:a16="http://schemas.microsoft.com/office/drawing/2014/main" id="{266C691E-541E-4A77-988A-7706A1A02635}"/>
               </a:ext>
             </a:extLst>
           </p:cNvPr>
@@ -10697,7 +10705,7 @@
           <p:cNvPr id="14" name="">
             <a:extLst xmlns:a="http://schemas.openxmlformats.org/drawingml/2006/main">
               <a:ext uri="{FF2B5EF4-FFF2-40B4-BE49-F238E27FC236}">
-                <a16:creationId xmlns:a16="http://schemas.microsoft.com/office/drawing/2014/main" id="{9818DBC8-2670-4957-BCD5-9297ACF65C66}"/>
+                <a16:creationId xmlns:a16="http://schemas.microsoft.com/office/drawing/2014/main" id="{A8B192BC-1B69-4C88-86B8-13E009395D93}"/>
               </a:ext>
             </a:extLst>
           </p:cNvPr>
@@ -10754,7 +10762,7 @@
           <p:cNvPr id="15" name="">
             <a:extLst xmlns:a="http://schemas.openxmlformats.org/drawingml/2006/main">
               <a:ext uri="{FF2B5EF4-FFF2-40B4-BE49-F238E27FC236}">
-                <a16:creationId xmlns:a16="http://schemas.microsoft.com/office/drawing/2014/main" id="{13C218C2-8B2F-4AFD-B5C9-D4AE15028D65}"/>
+                <a16:creationId xmlns:a16="http://schemas.microsoft.com/office/drawing/2014/main" id="{E52D1968-EF45-4FDE-96AE-52EDC8A72A63}"/>
               </a:ext>
             </a:extLst>
           </p:cNvPr>
@@ -10809,7 +10817,7 @@
     </p:spTree>
     <p:extLst>
       <p:ext uri="{BB962C8B-B14F-4D97-AF65-F5344CB8AC3E}">
-        <p14:creationId xmlns:p14="http://schemas.microsoft.com/office/powerpoint/2010/main" val="583562037"/>
+        <p14:creationId xmlns:p14="http://schemas.microsoft.com/office/powerpoint/2010/main" val="2037766524"/>
       </p:ext>
     </p:extLst>
   </p:cSld>
@@ -10964,7 +10972,7 @@
           <p:cNvPr id="16" name="">
             <a:extLst xmlns:a="http://schemas.openxmlformats.org/drawingml/2006/main">
               <a:ext uri="{FF2B5EF4-FFF2-40B4-BE49-F238E27FC236}">
-                <a16:creationId xmlns:a16="http://schemas.microsoft.com/office/drawing/2014/main" id="{A8F301A5-539C-48E5-B5A6-AEEE16FB407E}"/>
+                <a16:creationId xmlns:a16="http://schemas.microsoft.com/office/drawing/2014/main" id="{FAB50769-F373-43A8-A4A1-F6BC64FA4DAF}"/>
               </a:ext>
             </a:extLst>
           </p:cNvPr>
@@ -10996,7 +11004,7 @@
           <p:cNvPr id="2" name="">
             <a:extLst xmlns:a="http://schemas.openxmlformats.org/drawingml/2006/main">
               <a:ext uri="{FF2B5EF4-FFF2-40B4-BE49-F238E27FC236}">
-                <a16:creationId xmlns:a16="http://schemas.microsoft.com/office/drawing/2014/main" id="{6951A66F-6387-4B40-A706-C461FFD4F0A1}"/>
+                <a16:creationId xmlns:a16="http://schemas.microsoft.com/office/drawing/2014/main" id="{D7AB2180-8AD0-4C3F-AEE5-C3E19AB62B25}"/>
               </a:ext>
             </a:extLst>
           </p:cNvPr>
@@ -11053,7 +11061,7 @@
           <p:cNvPr id="3" name="">
             <a:extLst xmlns:a="http://schemas.openxmlformats.org/drawingml/2006/main">
               <a:ext uri="{FF2B5EF4-FFF2-40B4-BE49-F238E27FC236}">
-                <a16:creationId xmlns:a16="http://schemas.microsoft.com/office/drawing/2014/main" id="{DF9D6989-85A2-419E-BC4E-9FE243954A49}"/>
+                <a16:creationId xmlns:a16="http://schemas.microsoft.com/office/drawing/2014/main" id="{806819A1-5071-4EDB-BEBB-05E8A57ADB4F}"/>
               </a:ext>
             </a:extLst>
           </p:cNvPr>
@@ -11085,7 +11093,7 @@
           <p:cNvPr id="4" name="">
             <a:extLst xmlns:a="http://schemas.openxmlformats.org/drawingml/2006/main">
               <a:ext uri="{FF2B5EF4-FFF2-40B4-BE49-F238E27FC236}">
-                <a16:creationId xmlns:a16="http://schemas.microsoft.com/office/drawing/2014/main" id="{16E55E2B-FCA3-4B1F-A3C0-E5451BD60566}"/>
+                <a16:creationId xmlns:a16="http://schemas.microsoft.com/office/drawing/2014/main" id="{C7498D0A-A5C2-4788-95E8-9B596E2C054E}"/>
               </a:ext>
             </a:extLst>
           </p:cNvPr>
@@ -11142,7 +11150,7 @@
           <p:cNvPr id="5" name="">
             <a:extLst xmlns:a="http://schemas.openxmlformats.org/drawingml/2006/main">
               <a:ext uri="{FF2B5EF4-FFF2-40B4-BE49-F238E27FC236}">
-                <a16:creationId xmlns:a16="http://schemas.microsoft.com/office/drawing/2014/main" id="{DACF6982-49EB-466C-B7C4-0EA96A58AE06}"/>
+                <a16:creationId xmlns:a16="http://schemas.microsoft.com/office/drawing/2014/main" id="{8C896170-9BFE-4062-89F6-A80A62933BDE}"/>
               </a:ext>
             </a:extLst>
           </p:cNvPr>
@@ -11199,7 +11207,7 @@
           <p:cNvPr id="6" name="">
             <a:extLst xmlns:a="http://schemas.openxmlformats.org/drawingml/2006/main">
               <a:ext uri="{FF2B5EF4-FFF2-40B4-BE49-F238E27FC236}">
-                <a16:creationId xmlns:a16="http://schemas.microsoft.com/office/drawing/2014/main" id="{FC1A7754-7DF4-49DF-A676-B52B4335410C}"/>
+                <a16:creationId xmlns:a16="http://schemas.microsoft.com/office/drawing/2014/main" id="{475C0BCC-7395-4C62-84C4-68CCBF6F82CC}"/>
               </a:ext>
             </a:extLst>
           </p:cNvPr>
@@ -11256,7 +11264,7 @@
           <p:cNvPr id="7" name="">
             <a:extLst xmlns:a="http://schemas.openxmlformats.org/drawingml/2006/main">
               <a:ext uri="{FF2B5EF4-FFF2-40B4-BE49-F238E27FC236}">
-                <a16:creationId xmlns:a16="http://schemas.microsoft.com/office/drawing/2014/main" id="{A6428E76-640A-4AE8-9C19-71838A3EEA10}"/>
+                <a16:creationId xmlns:a16="http://schemas.microsoft.com/office/drawing/2014/main" id="{090DAE07-0093-44BB-850F-F233A53963DB}"/>
               </a:ext>
             </a:extLst>
           </p:cNvPr>
@@ -11288,7 +11296,7 @@
           <p:cNvPr id="8" name="">
             <a:extLst xmlns:a="http://schemas.openxmlformats.org/drawingml/2006/main">
               <a:ext uri="{FF2B5EF4-FFF2-40B4-BE49-F238E27FC236}">
-                <a16:creationId xmlns:a16="http://schemas.microsoft.com/office/drawing/2014/main" id="{5B5BE6EE-1E2E-4370-A473-0FB85DE2395E}"/>
+                <a16:creationId xmlns:a16="http://schemas.microsoft.com/office/drawing/2014/main" id="{3B2F67AC-F394-4603-B780-E6379B1985AF}"/>
               </a:ext>
             </a:extLst>
           </p:cNvPr>
@@ -11345,7 +11353,7 @@
           <p:cNvPr id="9" name="">
             <a:extLst xmlns:a="http://schemas.openxmlformats.org/drawingml/2006/main">
               <a:ext uri="{FF2B5EF4-FFF2-40B4-BE49-F238E27FC236}">
-                <a16:creationId xmlns:a16="http://schemas.microsoft.com/office/drawing/2014/main" id="{DB88F471-7949-4655-A23A-1875EB01F9E4}"/>
+                <a16:creationId xmlns:a16="http://schemas.microsoft.com/office/drawing/2014/main" id="{96960DF9-14FA-402A-A3C8-76E20200D46E}"/>
               </a:ext>
             </a:extLst>
           </p:cNvPr>
@@ -11406,7 +11414,7 @@
           <p:nvPr/>
         </p:nvPicPr>
         <p:blipFill>
-          <a:blip xmlns:r="http://schemas.openxmlformats.org/officeDocument/2006/relationships" xmlns:a="http://schemas.openxmlformats.org/drawingml/2006/main" r:embed="Rae042db4c687420a"/>
+          <a:blip xmlns:r="http://schemas.openxmlformats.org/officeDocument/2006/relationships" xmlns:a="http://schemas.openxmlformats.org/drawingml/2006/main" r:embed="R62807d801d5143a3"/>
           <a:stretch xmlns:a="http://schemas.openxmlformats.org/drawingml/2006/main"/>
         </p:blipFill>
         <p:spPr>
@@ -11424,7 +11432,7 @@
           <p:cNvPr id="11" name="">
             <a:extLst xmlns:a="http://schemas.openxmlformats.org/drawingml/2006/main">
               <a:ext uri="{FF2B5EF4-FFF2-40B4-BE49-F238E27FC236}">
-                <a16:creationId xmlns:a16="http://schemas.microsoft.com/office/drawing/2014/main" id="{9F415F3F-8AEE-4693-8621-6748BEB6EB33}"/>
+                <a16:creationId xmlns:a16="http://schemas.microsoft.com/office/drawing/2014/main" id="{F370C500-90BC-4A5A-8D1A-9B83D5D3520E}"/>
               </a:ext>
             </a:extLst>
           </p:cNvPr>
@@ -11481,7 +11489,7 @@
           <p:cNvPr id="12" name="">
             <a:extLst xmlns:a="http://schemas.openxmlformats.org/drawingml/2006/main">
               <a:ext uri="{FF2B5EF4-FFF2-40B4-BE49-F238E27FC236}">
-                <a16:creationId xmlns:a16="http://schemas.microsoft.com/office/drawing/2014/main" id="{9CE7B295-581A-4DE6-94E2-2EA819437DCD}"/>
+                <a16:creationId xmlns:a16="http://schemas.microsoft.com/office/drawing/2014/main" id="{105F6B21-8F55-460F-A25D-31AB90141D33}"/>
               </a:ext>
             </a:extLst>
           </p:cNvPr>
@@ -11538,7 +11546,7 @@
           <p:cNvPr id="13" name="">
             <a:extLst xmlns:a="http://schemas.openxmlformats.org/drawingml/2006/main">
               <a:ext uri="{FF2B5EF4-FFF2-40B4-BE49-F238E27FC236}">
-                <a16:creationId xmlns:a16="http://schemas.microsoft.com/office/drawing/2014/main" id="{CC4F7AE0-9305-4AC7-8F37-AD56E0F2B8B4}"/>
+                <a16:creationId xmlns:a16="http://schemas.microsoft.com/office/drawing/2014/main" id="{B2C483EA-1D4A-43FF-A2EC-D72663B7F224}"/>
               </a:ext>
             </a:extLst>
           </p:cNvPr>
@@ -11570,7 +11578,7 @@
           <p:cNvPr id="14" name="">
             <a:extLst xmlns:a="http://schemas.openxmlformats.org/drawingml/2006/main">
               <a:ext uri="{FF2B5EF4-FFF2-40B4-BE49-F238E27FC236}">
-                <a16:creationId xmlns:a16="http://schemas.microsoft.com/office/drawing/2014/main" id="{0D49DE37-D724-4647-8B54-9BF5E56298EF}"/>
+                <a16:creationId xmlns:a16="http://schemas.microsoft.com/office/drawing/2014/main" id="{637E4ACE-F6E3-4EAD-8868-B97DC02AB00F}"/>
               </a:ext>
             </a:extLst>
           </p:cNvPr>
@@ -11627,7 +11635,7 @@
           <p:cNvPr id="15" name="">
             <a:extLst xmlns:a="http://schemas.openxmlformats.org/drawingml/2006/main">
               <a:ext uri="{FF2B5EF4-FFF2-40B4-BE49-F238E27FC236}">
-                <a16:creationId xmlns:a16="http://schemas.microsoft.com/office/drawing/2014/main" id="{75FCB320-7B3C-4031-991C-8F34AA2D3ADD}"/>
+                <a16:creationId xmlns:a16="http://schemas.microsoft.com/office/drawing/2014/main" id="{7900DBE2-D301-45A2-BEDC-EE4CDE8539B5}"/>
               </a:ext>
             </a:extLst>
           </p:cNvPr>
@@ -11682,7 +11690,7 @@
     </p:spTree>
     <p:extLst>
       <p:ext uri="{BB962C8B-B14F-4D97-AF65-F5344CB8AC3E}">
-        <p14:creationId xmlns:p14="http://schemas.microsoft.com/office/powerpoint/2010/main" val="1434348060"/>
+        <p14:creationId xmlns:p14="http://schemas.microsoft.com/office/powerpoint/2010/main" val="1051297255"/>
       </p:ext>
     </p:extLst>
   </p:cSld>
@@ -11837,7 +11845,7 @@
           <p:cNvPr id="23" name="">
             <a:extLst xmlns:a="http://schemas.openxmlformats.org/drawingml/2006/main">
               <a:ext uri="{FF2B5EF4-FFF2-40B4-BE49-F238E27FC236}">
-                <a16:creationId xmlns:a16="http://schemas.microsoft.com/office/drawing/2014/main" id="{9C690B32-474A-43DB-8684-9E0263B80E89}"/>
+                <a16:creationId xmlns:a16="http://schemas.microsoft.com/office/drawing/2014/main" id="{FA39735F-918F-4215-BC1A-7955AAC60131}"/>
               </a:ext>
             </a:extLst>
           </p:cNvPr>
@@ -11869,7 +11877,7 @@
           <p:cNvPr id="2" name="">
             <a:extLst xmlns:a="http://schemas.openxmlformats.org/drawingml/2006/main">
               <a:ext uri="{FF2B5EF4-FFF2-40B4-BE49-F238E27FC236}">
-                <a16:creationId xmlns:a16="http://schemas.microsoft.com/office/drawing/2014/main" id="{4CC2FAD2-C3BC-41E5-B878-97293C688627}"/>
+                <a16:creationId xmlns:a16="http://schemas.microsoft.com/office/drawing/2014/main" id="{697DB8E5-7114-4FB0-A6F7-6420967EC9BD}"/>
               </a:ext>
             </a:extLst>
           </p:cNvPr>
@@ -11926,7 +11934,7 @@
           <p:cNvPr id="3" name="">
             <a:extLst xmlns:a="http://schemas.openxmlformats.org/drawingml/2006/main">
               <a:ext uri="{FF2B5EF4-FFF2-40B4-BE49-F238E27FC236}">
-                <a16:creationId xmlns:a16="http://schemas.microsoft.com/office/drawing/2014/main" id="{45DFFE53-CE20-47F0-9C6A-92EF9F702E96}"/>
+                <a16:creationId xmlns:a16="http://schemas.microsoft.com/office/drawing/2014/main" id="{64E18E41-CEF8-461A-86E4-0CFCC940319A}"/>
               </a:ext>
             </a:extLst>
           </p:cNvPr>
@@ -11958,7 +11966,7 @@
           <p:cNvPr id="4" name="">
             <a:extLst xmlns:a="http://schemas.openxmlformats.org/drawingml/2006/main">
               <a:ext uri="{FF2B5EF4-FFF2-40B4-BE49-F238E27FC236}">
-                <a16:creationId xmlns:a16="http://schemas.microsoft.com/office/drawing/2014/main" id="{1ACBAD3B-FBEB-4217-8691-05F0CF252487}"/>
+                <a16:creationId xmlns:a16="http://schemas.microsoft.com/office/drawing/2014/main" id="{F279DE05-A01A-461A-B9D5-0126AEC5BA5C}"/>
               </a:ext>
             </a:extLst>
           </p:cNvPr>
@@ -12015,7 +12023,7 @@
           <p:cNvPr id="5" name="">
             <a:extLst xmlns:a="http://schemas.openxmlformats.org/drawingml/2006/main">
               <a:ext uri="{FF2B5EF4-FFF2-40B4-BE49-F238E27FC236}">
-                <a16:creationId xmlns:a16="http://schemas.microsoft.com/office/drawing/2014/main" id="{663D34D5-7AD6-4D40-8893-079D08DE61FE}"/>
+                <a16:creationId xmlns:a16="http://schemas.microsoft.com/office/drawing/2014/main" id="{F0DDCE10-EEC9-4BAA-A4A8-7E3D2ADE328B}"/>
               </a:ext>
             </a:extLst>
           </p:cNvPr>
@@ -12072,7 +12080,7 @@
           <p:cNvPr id="6" name="">
             <a:extLst xmlns:a="http://schemas.openxmlformats.org/drawingml/2006/main">
               <a:ext uri="{FF2B5EF4-FFF2-40B4-BE49-F238E27FC236}">
-                <a16:creationId xmlns:a16="http://schemas.microsoft.com/office/drawing/2014/main" id="{1E860D2A-41B0-4268-A49A-88245B47C484}"/>
+                <a16:creationId xmlns:a16="http://schemas.microsoft.com/office/drawing/2014/main" id="{FB2B727A-0B59-494D-B140-1D1ED2EC6595}"/>
               </a:ext>
             </a:extLst>
           </p:cNvPr>
@@ -12129,7 +12137,7 @@
           <p:cNvPr id="7" name="">
             <a:extLst xmlns:a="http://schemas.openxmlformats.org/drawingml/2006/main">
               <a:ext uri="{FF2B5EF4-FFF2-40B4-BE49-F238E27FC236}">
-                <a16:creationId xmlns:a16="http://schemas.microsoft.com/office/drawing/2014/main" id="{68EBA61F-88EF-48AC-8DD2-E5C1A00133A1}"/>
+                <a16:creationId xmlns:a16="http://schemas.microsoft.com/office/drawing/2014/main" id="{2491338C-48B5-41FE-A7CA-CCF92CEFB437}"/>
               </a:ext>
             </a:extLst>
           </p:cNvPr>
@@ -12161,7 +12169,7 @@
           <p:cNvPr id="8" name="">
             <a:extLst xmlns:a="http://schemas.openxmlformats.org/drawingml/2006/main">
               <a:ext uri="{FF2B5EF4-FFF2-40B4-BE49-F238E27FC236}">
-                <a16:creationId xmlns:a16="http://schemas.microsoft.com/office/drawing/2014/main" id="{01F16E64-2407-4952-8885-40F1EE1DE819}"/>
+                <a16:creationId xmlns:a16="http://schemas.microsoft.com/office/drawing/2014/main" id="{C778CFF0-1E4D-4D1B-86E9-7120CC385AB5}"/>
               </a:ext>
             </a:extLst>
           </p:cNvPr>
@@ -12218,7 +12226,7 @@
           <p:cNvPr id="9" name="">
             <a:extLst xmlns:a="http://schemas.openxmlformats.org/drawingml/2006/main">
               <a:ext uri="{FF2B5EF4-FFF2-40B4-BE49-F238E27FC236}">
-                <a16:creationId xmlns:a16="http://schemas.microsoft.com/office/drawing/2014/main" id="{9BBE20C4-78F0-425F-A962-6E0A91D1D8CA}"/>
+                <a16:creationId xmlns:a16="http://schemas.microsoft.com/office/drawing/2014/main" id="{2F7B4DF5-26FD-44AD-8AE0-2A07C2B152D0}"/>
               </a:ext>
             </a:extLst>
           </p:cNvPr>
@@ -12275,7 +12283,7 @@
           <p:cNvPr id="10" name="">
             <a:extLst xmlns:a="http://schemas.openxmlformats.org/drawingml/2006/main">
               <a:ext uri="{FF2B5EF4-FFF2-40B4-BE49-F238E27FC236}">
-                <a16:creationId xmlns:a16="http://schemas.microsoft.com/office/drawing/2014/main" id="{0432471A-6520-4429-8169-4E2E319BEDD2}"/>
+                <a16:creationId xmlns:a16="http://schemas.microsoft.com/office/drawing/2014/main" id="{A8A0C584-17F4-41BD-9C20-1F46D4D85E71}"/>
               </a:ext>
             </a:extLst>
           </p:cNvPr>
@@ -12309,7 +12317,7 @@
           <p:cNvPr id="11" name="">
             <a:extLst xmlns:a="http://schemas.openxmlformats.org/drawingml/2006/main">
               <a:ext uri="{FF2B5EF4-FFF2-40B4-BE49-F238E27FC236}">
-                <a16:creationId xmlns:a16="http://schemas.microsoft.com/office/drawing/2014/main" id="{E6348EAA-C5C6-4075-BACB-3BBBB471D582}"/>
+                <a16:creationId xmlns:a16="http://schemas.microsoft.com/office/drawing/2014/main" id="{6C19945D-635F-40CD-839C-4E3EAA6B3031}"/>
               </a:ext>
             </a:extLst>
           </p:cNvPr>
@@ -12341,7 +12349,7 @@
           <p:cNvPr id="12" name="">
             <a:extLst xmlns:a="http://schemas.openxmlformats.org/drawingml/2006/main">
               <a:ext uri="{FF2B5EF4-FFF2-40B4-BE49-F238E27FC236}">
-                <a16:creationId xmlns:a16="http://schemas.microsoft.com/office/drawing/2014/main" id="{20558B2D-BD22-43EC-9B19-532F905455EE}"/>
+                <a16:creationId xmlns:a16="http://schemas.microsoft.com/office/drawing/2014/main" id="{0C6BADF5-258F-46E0-92BB-F9A4DFED52AB}"/>
               </a:ext>
             </a:extLst>
           </p:cNvPr>
@@ -12398,7 +12406,7 @@
           <p:cNvPr id="13" name="">
             <a:extLst xmlns:a="http://schemas.openxmlformats.org/drawingml/2006/main">
               <a:ext uri="{FF2B5EF4-FFF2-40B4-BE49-F238E27FC236}">
-                <a16:creationId xmlns:a16="http://schemas.microsoft.com/office/drawing/2014/main" id="{B08E0BEB-3D72-4DE1-A062-FEFCEC1B9694}"/>
+                <a16:creationId xmlns:a16="http://schemas.microsoft.com/office/drawing/2014/main" id="{988DE9CF-8833-4919-BD70-6DE6148BBCF9}"/>
               </a:ext>
             </a:extLst>
           </p:cNvPr>
@@ -12455,7 +12463,7 @@
           <p:cNvPr id="14" name="">
             <a:extLst xmlns:a="http://schemas.openxmlformats.org/drawingml/2006/main">
               <a:ext uri="{FF2B5EF4-FFF2-40B4-BE49-F238E27FC236}">
-                <a16:creationId xmlns:a16="http://schemas.microsoft.com/office/drawing/2014/main" id="{3A1A87E5-12BF-46C7-80E8-50FD6BBD7182}"/>
+                <a16:creationId xmlns:a16="http://schemas.microsoft.com/office/drawing/2014/main" id="{173DFDE2-4BFB-431B-810F-C6C180D347F8}"/>
               </a:ext>
             </a:extLst>
           </p:cNvPr>
@@ -12489,7 +12497,7 @@
           <p:cNvPr id="15" name="">
             <a:extLst xmlns:a="http://schemas.openxmlformats.org/drawingml/2006/main">
               <a:ext uri="{FF2B5EF4-FFF2-40B4-BE49-F238E27FC236}">
-                <a16:creationId xmlns:a16="http://schemas.microsoft.com/office/drawing/2014/main" id="{76B9AF98-BFD1-4C6A-9244-0FD65DFC0F59}"/>
+                <a16:creationId xmlns:a16="http://schemas.microsoft.com/office/drawing/2014/main" id="{FA082A63-FD81-4F01-8C5D-0D46C9345955}"/>
               </a:ext>
             </a:extLst>
           </p:cNvPr>
@@ -12521,7 +12529,7 @@
           <p:cNvPr id="16" name="">
             <a:extLst xmlns:a="http://schemas.openxmlformats.org/drawingml/2006/main">
               <a:ext uri="{FF2B5EF4-FFF2-40B4-BE49-F238E27FC236}">
-                <a16:creationId xmlns:a16="http://schemas.microsoft.com/office/drawing/2014/main" id="{2E0B355E-A0BC-4A00-8409-2F74EFFF2DB2}"/>
+                <a16:creationId xmlns:a16="http://schemas.microsoft.com/office/drawing/2014/main" id="{A3A03622-667B-4180-BE8A-9FFB00E1AD42}"/>
               </a:ext>
             </a:extLst>
           </p:cNvPr>
@@ -12578,7 +12586,7 @@
           <p:cNvPr id="17" name="">
             <a:extLst xmlns:a="http://schemas.openxmlformats.org/drawingml/2006/main">
               <a:ext uri="{FF2B5EF4-FFF2-40B4-BE49-F238E27FC236}">
-                <a16:creationId xmlns:a16="http://schemas.microsoft.com/office/drawing/2014/main" id="{A7218744-FEA0-4398-8D22-40C631A00E32}"/>
+                <a16:creationId xmlns:a16="http://schemas.microsoft.com/office/drawing/2014/main" id="{85684418-404D-4287-94B8-D2CA0C93084E}"/>
               </a:ext>
             </a:extLst>
           </p:cNvPr>
@@ -12635,7 +12643,7 @@
           <p:cNvPr id="18" name="">
             <a:extLst xmlns:a="http://schemas.openxmlformats.org/drawingml/2006/main">
               <a:ext uri="{FF2B5EF4-FFF2-40B4-BE49-F238E27FC236}">
-                <a16:creationId xmlns:a16="http://schemas.microsoft.com/office/drawing/2014/main" id="{7EE24DEF-76D1-4CA2-BA79-FC6511FF5972}"/>
+                <a16:creationId xmlns:a16="http://schemas.microsoft.com/office/drawing/2014/main" id="{CB0761F1-2398-48DE-84FA-6134E5E1035E}"/>
               </a:ext>
             </a:extLst>
           </p:cNvPr>
@@ -12669,7 +12677,7 @@
           <p:cNvPr id="19" name="">
             <a:extLst xmlns:a="http://schemas.openxmlformats.org/drawingml/2006/main">
               <a:ext uri="{FF2B5EF4-FFF2-40B4-BE49-F238E27FC236}">
-                <a16:creationId xmlns:a16="http://schemas.microsoft.com/office/drawing/2014/main" id="{651DB310-779A-4280-9C69-C7C9DE8F9ED2}"/>
+                <a16:creationId xmlns:a16="http://schemas.microsoft.com/office/drawing/2014/main" id="{05E1692F-2055-4D2B-87EC-C3DC596BA8CD}"/>
               </a:ext>
             </a:extLst>
           </p:cNvPr>
@@ -12701,7 +12709,7 @@
           <p:cNvPr id="20" name="">
             <a:extLst xmlns:a="http://schemas.openxmlformats.org/drawingml/2006/main">
               <a:ext uri="{FF2B5EF4-FFF2-40B4-BE49-F238E27FC236}">
-                <a16:creationId xmlns:a16="http://schemas.microsoft.com/office/drawing/2014/main" id="{8BFDC205-794D-46CA-8A79-2C36DC095D5E}"/>
+                <a16:creationId xmlns:a16="http://schemas.microsoft.com/office/drawing/2014/main" id="{7F5E129F-35B1-4E3E-9EC0-73E64C22C15F}"/>
               </a:ext>
             </a:extLst>
           </p:cNvPr>
@@ -12758,7 +12766,7 @@
           <p:cNvPr id="21" name="">
             <a:extLst xmlns:a="http://schemas.openxmlformats.org/drawingml/2006/main">
               <a:ext uri="{FF2B5EF4-FFF2-40B4-BE49-F238E27FC236}">
-                <a16:creationId xmlns:a16="http://schemas.microsoft.com/office/drawing/2014/main" id="{0DB77D8B-92BD-418B-B736-DF1B9A0B952B}"/>
+                <a16:creationId xmlns:a16="http://schemas.microsoft.com/office/drawing/2014/main" id="{E764ADB0-F42C-4681-9E0C-B5F1C8C6ED4B}"/>
               </a:ext>
             </a:extLst>
           </p:cNvPr>
@@ -12815,7 +12823,7 @@
           <p:cNvPr id="22" name="">
             <a:extLst xmlns:a="http://schemas.openxmlformats.org/drawingml/2006/main">
               <a:ext uri="{FF2B5EF4-FFF2-40B4-BE49-F238E27FC236}">
-                <a16:creationId xmlns:a16="http://schemas.microsoft.com/office/drawing/2014/main" id="{6311E11E-F00B-420A-A64B-FB886E267998}"/>
+                <a16:creationId xmlns:a16="http://schemas.microsoft.com/office/drawing/2014/main" id="{C08D5F0D-045B-4791-8C0B-10751775A218}"/>
               </a:ext>
             </a:extLst>
           </p:cNvPr>
@@ -12870,7 +12878,7 @@
     </p:spTree>
     <p:extLst>
       <p:ext uri="{BB962C8B-B14F-4D97-AF65-F5344CB8AC3E}">
-        <p14:creationId xmlns:p14="http://schemas.microsoft.com/office/powerpoint/2010/main" val="549803950"/>
+        <p14:creationId xmlns:p14="http://schemas.microsoft.com/office/powerpoint/2010/main" val="1990379618"/>
       </p:ext>
     </p:extLst>
   </p:cSld>
@@ -13071,7 +13079,7 @@
           <p:cNvPr id="22" name="">
             <a:extLst xmlns:a="http://schemas.openxmlformats.org/drawingml/2006/main">
               <a:ext uri="{FF2B5EF4-FFF2-40B4-BE49-F238E27FC236}">
-                <a16:creationId xmlns:a16="http://schemas.microsoft.com/office/drawing/2014/main" id="{78969365-23BF-4F69-B016-241D2523C2F8}"/>
+                <a16:creationId xmlns:a16="http://schemas.microsoft.com/office/drawing/2014/main" id="{F0987E20-0237-452A-A1DF-3F6B7DB58BD5}"/>
               </a:ext>
             </a:extLst>
           </p:cNvPr>
@@ -13103,7 +13111,7 @@
           <p:cNvPr id="2" name="">
             <a:extLst xmlns:a="http://schemas.openxmlformats.org/drawingml/2006/main">
               <a:ext uri="{FF2B5EF4-FFF2-40B4-BE49-F238E27FC236}">
-                <a16:creationId xmlns:a16="http://schemas.microsoft.com/office/drawing/2014/main" id="{36156C5D-A905-4A19-B977-1B7B814A5F0C}"/>
+                <a16:creationId xmlns:a16="http://schemas.microsoft.com/office/drawing/2014/main" id="{F531B580-372E-483F-9A3F-4194DF9108C8}"/>
               </a:ext>
             </a:extLst>
           </p:cNvPr>
@@ -13160,7 +13168,7 @@
           <p:cNvPr id="3" name="">
             <a:extLst xmlns:a="http://schemas.openxmlformats.org/drawingml/2006/main">
               <a:ext uri="{FF2B5EF4-FFF2-40B4-BE49-F238E27FC236}">
-                <a16:creationId xmlns:a16="http://schemas.microsoft.com/office/drawing/2014/main" id="{DFD81296-F91F-4CAA-AEA5-0E46B8A72A09}"/>
+                <a16:creationId xmlns:a16="http://schemas.microsoft.com/office/drawing/2014/main" id="{0C819E4D-A828-46CA-9F08-0A0FB7DC3736}"/>
               </a:ext>
             </a:extLst>
           </p:cNvPr>
@@ -13192,7 +13200,7 @@
           <p:cNvPr id="4" name="">
             <a:extLst xmlns:a="http://schemas.openxmlformats.org/drawingml/2006/main">
               <a:ext uri="{FF2B5EF4-FFF2-40B4-BE49-F238E27FC236}">
-                <a16:creationId xmlns:a16="http://schemas.microsoft.com/office/drawing/2014/main" id="{6F3EC8BE-9AE6-43C7-89BB-97EAF0A92464}"/>
+                <a16:creationId xmlns:a16="http://schemas.microsoft.com/office/drawing/2014/main" id="{9972C103-374E-4665-8F10-9556A180ACEA}"/>
               </a:ext>
             </a:extLst>
           </p:cNvPr>
@@ -13249,7 +13257,7 @@
           <p:cNvPr id="5" name="">
             <a:extLst xmlns:a="http://schemas.openxmlformats.org/drawingml/2006/main">
               <a:ext uri="{FF2B5EF4-FFF2-40B4-BE49-F238E27FC236}">
-                <a16:creationId xmlns:a16="http://schemas.microsoft.com/office/drawing/2014/main" id="{E01CCECF-E525-4B98-AB5A-0F8532EF8F16}"/>
+                <a16:creationId xmlns:a16="http://schemas.microsoft.com/office/drawing/2014/main" id="{EA3B0A88-30E9-490D-8508-A3E5E4BE8CFE}"/>
               </a:ext>
             </a:extLst>
           </p:cNvPr>
@@ -13306,7 +13314,7 @@
           <p:cNvPr id="6" name="">
             <a:extLst xmlns:a="http://schemas.openxmlformats.org/drawingml/2006/main">
               <a:ext uri="{FF2B5EF4-FFF2-40B4-BE49-F238E27FC236}">
-                <a16:creationId xmlns:a16="http://schemas.microsoft.com/office/drawing/2014/main" id="{BFE04C33-8E3F-45A4-9FA7-C72844A8CE87}"/>
+                <a16:creationId xmlns:a16="http://schemas.microsoft.com/office/drawing/2014/main" id="{B0D8D3A4-14F2-4740-91D2-AB67524DBDD1}"/>
               </a:ext>
             </a:extLst>
           </p:cNvPr>
@@ -13363,7 +13371,7 @@
           <p:cNvPr id="7" name="">
             <a:extLst xmlns:a="http://schemas.openxmlformats.org/drawingml/2006/main">
               <a:ext uri="{FF2B5EF4-FFF2-40B4-BE49-F238E27FC236}">
-                <a16:creationId xmlns:a16="http://schemas.microsoft.com/office/drawing/2014/main" id="{525A1AE8-5477-4A0A-A31D-E6FD85BC1364}"/>
+                <a16:creationId xmlns:a16="http://schemas.microsoft.com/office/drawing/2014/main" id="{5FB442B0-4EAC-4020-BD90-006A5B401C3A}"/>
               </a:ext>
             </a:extLst>
           </p:cNvPr>
@@ -13395,7 +13403,7 @@
           <p:cNvPr id="8" name="">
             <a:extLst xmlns:a="http://schemas.openxmlformats.org/drawingml/2006/main">
               <a:ext uri="{FF2B5EF4-FFF2-40B4-BE49-F238E27FC236}">
-                <a16:creationId xmlns:a16="http://schemas.microsoft.com/office/drawing/2014/main" id="{3E262954-7BCA-41DB-A6A1-22D1B508F782}"/>
+                <a16:creationId xmlns:a16="http://schemas.microsoft.com/office/drawing/2014/main" id="{9AB08458-15DF-45D5-ADB3-BB9E87732D27}"/>
               </a:ext>
             </a:extLst>
           </p:cNvPr>
@@ -13452,7 +13460,7 @@
           <p:cNvPr id="9" name="">
             <a:extLst xmlns:a="http://schemas.openxmlformats.org/drawingml/2006/main">
               <a:ext uri="{FF2B5EF4-FFF2-40B4-BE49-F238E27FC236}">
-                <a16:creationId xmlns:a16="http://schemas.microsoft.com/office/drawing/2014/main" id="{B3486AA2-035F-4F0B-AAA2-F70007D1D203}"/>
+                <a16:creationId xmlns:a16="http://schemas.microsoft.com/office/drawing/2014/main" id="{CDA2FD4C-87B0-464B-86C8-22B7696DF014}"/>
               </a:ext>
             </a:extLst>
           </p:cNvPr>
@@ -13509,7 +13517,7 @@
           <p:cNvPr id="10" name="">
             <a:extLst xmlns:a="http://schemas.openxmlformats.org/drawingml/2006/main">
               <a:ext uri="{FF2B5EF4-FFF2-40B4-BE49-F238E27FC236}">
-                <a16:creationId xmlns:a16="http://schemas.microsoft.com/office/drawing/2014/main" id="{81D6C1A2-AA4B-487E-BF6C-AF9DA62E697D}"/>
+                <a16:creationId xmlns:a16="http://schemas.microsoft.com/office/drawing/2014/main" id="{4B9990C6-E960-4A2F-8E2A-0EF38AA91F95}"/>
               </a:ext>
             </a:extLst>
           </p:cNvPr>
@@ -13543,7 +13551,7 @@
           <p:cNvPr id="11" name="">
             <a:extLst xmlns:a="http://schemas.openxmlformats.org/drawingml/2006/main">
               <a:ext uri="{FF2B5EF4-FFF2-40B4-BE49-F238E27FC236}">
-                <a16:creationId xmlns:a16="http://schemas.microsoft.com/office/drawing/2014/main" id="{D25E924E-BC9D-4657-9D95-7914D76B405E}"/>
+                <a16:creationId xmlns:a16="http://schemas.microsoft.com/office/drawing/2014/main" id="{919ED814-5C1B-4109-A019-271F01E58938}"/>
               </a:ext>
             </a:extLst>
           </p:cNvPr>
@@ -13575,7 +13583,7 @@
           <p:cNvPr id="12" name="">
             <a:extLst xmlns:a="http://schemas.openxmlformats.org/drawingml/2006/main">
               <a:ext uri="{FF2B5EF4-FFF2-40B4-BE49-F238E27FC236}">
-                <a16:creationId xmlns:a16="http://schemas.microsoft.com/office/drawing/2014/main" id="{B97EFA02-8FCE-4F7B-975C-850D43FB0689}"/>
+                <a16:creationId xmlns:a16="http://schemas.microsoft.com/office/drawing/2014/main" id="{5B65DE48-3B95-4625-B3D8-E9410AFC1A6E}"/>
               </a:ext>
             </a:extLst>
           </p:cNvPr>
@@ -13632,7 +13640,7 @@
           <p:cNvPr id="13" name="">
             <a:extLst xmlns:a="http://schemas.openxmlformats.org/drawingml/2006/main">
               <a:ext uri="{FF2B5EF4-FFF2-40B4-BE49-F238E27FC236}">
-                <a16:creationId xmlns:a16="http://schemas.microsoft.com/office/drawing/2014/main" id="{AAECD0CA-9402-4DF2-BBB6-1F6DB33542DC}"/>
+                <a16:creationId xmlns:a16="http://schemas.microsoft.com/office/drawing/2014/main" id="{F53239A7-4853-4A94-A34B-BB1969BD4ED8}"/>
               </a:ext>
             </a:extLst>
           </p:cNvPr>
@@ -13689,7 +13697,7 @@
           <p:cNvPr id="14" name="">
             <a:extLst xmlns:a="http://schemas.openxmlformats.org/drawingml/2006/main">
               <a:ext uri="{FF2B5EF4-FFF2-40B4-BE49-F238E27FC236}">
-                <a16:creationId xmlns:a16="http://schemas.microsoft.com/office/drawing/2014/main" id="{14FE8164-BB7E-464B-8340-B5F160BBC76F}"/>
+                <a16:creationId xmlns:a16="http://schemas.microsoft.com/office/drawing/2014/main" id="{40BEAA32-963A-478A-8250-EADA1A02B06D}"/>
               </a:ext>
             </a:extLst>
           </p:cNvPr>
@@ -13723,7 +13731,7 @@
           <p:cNvPr id="15" name="">
             <a:extLst xmlns:a="http://schemas.openxmlformats.org/drawingml/2006/main">
               <a:ext uri="{FF2B5EF4-FFF2-40B4-BE49-F238E27FC236}">
-                <a16:creationId xmlns:a16="http://schemas.microsoft.com/office/drawing/2014/main" id="{A7F2DB20-D913-485D-9628-632EE500D03C}"/>
+                <a16:creationId xmlns:a16="http://schemas.microsoft.com/office/drawing/2014/main" id="{2CF77C41-C326-40FE-8341-50702BB2ECA6}"/>
               </a:ext>
             </a:extLst>
           </p:cNvPr>
@@ -13755,7 +13763,7 @@
           <p:cNvPr id="16" name="">
             <a:extLst xmlns:a="http://schemas.openxmlformats.org/drawingml/2006/main">
               <a:ext uri="{FF2B5EF4-FFF2-40B4-BE49-F238E27FC236}">
-                <a16:creationId xmlns:a16="http://schemas.microsoft.com/office/drawing/2014/main" id="{72E6660C-45B8-473D-B4C4-B7F3243BF40E}"/>
+                <a16:creationId xmlns:a16="http://schemas.microsoft.com/office/drawing/2014/main" id="{3FC176EB-6398-4F34-9875-EBDB95AB92AA}"/>
               </a:ext>
             </a:extLst>
           </p:cNvPr>
@@ -13812,7 +13820,7 @@
           <p:cNvPr id="17" name="">
             <a:extLst xmlns:a="http://schemas.openxmlformats.org/drawingml/2006/main">
               <a:ext uri="{FF2B5EF4-FFF2-40B4-BE49-F238E27FC236}">
-                <a16:creationId xmlns:a16="http://schemas.microsoft.com/office/drawing/2014/main" id="{008BAEDF-C09D-4DC6-A479-53248621D872}"/>
+                <a16:creationId xmlns:a16="http://schemas.microsoft.com/office/drawing/2014/main" id="{4281799A-26D0-4E99-BE6A-222631FE4961}"/>
               </a:ext>
             </a:extLst>
           </p:cNvPr>
@@ -13869,7 +13877,7 @@
           <p:cNvPr id="18" name="">
             <a:extLst xmlns:a="http://schemas.openxmlformats.org/drawingml/2006/main">
               <a:ext uri="{FF2B5EF4-FFF2-40B4-BE49-F238E27FC236}">
-                <a16:creationId xmlns:a16="http://schemas.microsoft.com/office/drawing/2014/main" id="{60B6E219-529D-485B-8527-E07042670522}"/>
+                <a16:creationId xmlns:a16="http://schemas.microsoft.com/office/drawing/2014/main" id="{B493636F-F0D9-4CCB-8FFC-6E433C13A04B}"/>
               </a:ext>
             </a:extLst>
           </p:cNvPr>
@@ -13903,7 +13911,7 @@
           <p:cNvPr id="19" name="">
             <a:extLst xmlns:a="http://schemas.openxmlformats.org/drawingml/2006/main">
               <a:ext uri="{FF2B5EF4-FFF2-40B4-BE49-F238E27FC236}">
-                <a16:creationId xmlns:a16="http://schemas.microsoft.com/office/drawing/2014/main" id="{D1194E10-DD24-43DD-972D-36EF23BB378C}"/>
+                <a16:creationId xmlns:a16="http://schemas.microsoft.com/office/drawing/2014/main" id="{53144866-DA4E-45BA-A132-21F890FE36D2}"/>
               </a:ext>
             </a:extLst>
           </p:cNvPr>
@@ -13935,7 +13943,7 @@
           <p:cNvPr id="20" name="">
             <a:extLst xmlns:a="http://schemas.openxmlformats.org/drawingml/2006/main">
               <a:ext uri="{FF2B5EF4-FFF2-40B4-BE49-F238E27FC236}">
-                <a16:creationId xmlns:a16="http://schemas.microsoft.com/office/drawing/2014/main" id="{EF918351-D3CF-460A-8E48-5933E03BC2DD}"/>
+                <a16:creationId xmlns:a16="http://schemas.microsoft.com/office/drawing/2014/main" id="{EB32CFB9-1D0B-4E8A-A005-639EF1BF98E6}"/>
               </a:ext>
             </a:extLst>
           </p:cNvPr>
@@ -13992,7 +14000,7 @@
           <p:cNvPr id="21" name="">
             <a:extLst xmlns:a="http://schemas.openxmlformats.org/drawingml/2006/main">
               <a:ext uri="{FF2B5EF4-FFF2-40B4-BE49-F238E27FC236}">
-                <a16:creationId xmlns:a16="http://schemas.microsoft.com/office/drawing/2014/main" id="{71607BB4-1027-42DF-8AB0-D5F997C16B8F}"/>
+                <a16:creationId xmlns:a16="http://schemas.microsoft.com/office/drawing/2014/main" id="{59234937-E1A0-4543-9935-6545CB8ED41F}"/>
               </a:ext>
             </a:extLst>
           </p:cNvPr>
@@ -14047,7 +14055,7 @@
     </p:spTree>
     <p:extLst>
       <p:ext uri="{BB962C8B-B14F-4D97-AF65-F5344CB8AC3E}">
-        <p14:creationId xmlns:p14="http://schemas.microsoft.com/office/powerpoint/2010/main" val="444764126"/>
+        <p14:creationId xmlns:p14="http://schemas.microsoft.com/office/powerpoint/2010/main" val="520946093"/>
       </p:ext>
     </p:extLst>
   </p:cSld>
